--- a/Dars materiallari 2025-2026/Sun'iy intellekt asoslari 2025-2026/1.2 Pythonda arifmetik operatorlar/1.2 Pythonda arifmetik operatorlar.pptx
+++ b/Dars materiallari 2025-2026/Sun'iy intellekt asoslari 2025-2026/1.2 Pythonda arifmetik operatorlar/1.2 Pythonda arifmetik operatorlar.pptx
@@ -9,7 +9,7 @@
   </p:notesMasterIdLst>
   <p:sldIdLst>
     <p:sldId id="268" r:id="rId2"/>
-    <p:sldId id="289" r:id="rId3"/>
+    <p:sldId id="290" r:id="rId3"/>
     <p:sldId id="256" r:id="rId4"/>
     <p:sldId id="267" r:id="rId5"/>
     <p:sldId id="280" r:id="rId6"/>
@@ -210,7 +210,7 @@
           <a:p>
             <a:fld id="{0A3627AC-4C54-4CB2-BD4C-DADE51631177}" type="datetimeFigureOut">
               <a:rPr lang="LID4096" smtClean="0"/>
-              <a:t>09/11/2025</a:t>
+              <a:t>09/18/2025</a:t>
             </a:fld>
             <a:endParaRPr lang="LID4096"/>
           </a:p>
@@ -706,7 +706,7 @@
           <a:p>
             <a:fld id="{19CC64D6-7849-43A0-8B5C-E0A4D3B49E93}" type="datetimeFigureOut">
               <a:rPr lang="LID4096" smtClean="0"/>
-              <a:t>09/11/2025</a:t>
+              <a:t>09/18/2025</a:t>
             </a:fld>
             <a:endParaRPr lang="LID4096"/>
           </a:p>
@@ -906,7 +906,7 @@
           <a:p>
             <a:fld id="{19CC64D6-7849-43A0-8B5C-E0A4D3B49E93}" type="datetimeFigureOut">
               <a:rPr lang="LID4096" smtClean="0"/>
-              <a:t>09/11/2025</a:t>
+              <a:t>09/18/2025</a:t>
             </a:fld>
             <a:endParaRPr lang="LID4096"/>
           </a:p>
@@ -1116,7 +1116,7 @@
           <a:p>
             <a:fld id="{19CC64D6-7849-43A0-8B5C-E0A4D3B49E93}" type="datetimeFigureOut">
               <a:rPr lang="LID4096" smtClean="0"/>
-              <a:t>09/11/2025</a:t>
+              <a:t>09/18/2025</a:t>
             </a:fld>
             <a:endParaRPr lang="LID4096"/>
           </a:p>
@@ -1351,7 +1351,7 @@
           <a:p>
             <a:fld id="{19CC64D6-7849-43A0-8B5C-E0A4D3B49E93}" type="datetimeFigureOut">
               <a:rPr lang="LID4096" smtClean="0"/>
-              <a:t>09/11/2025</a:t>
+              <a:t>09/18/2025</a:t>
             </a:fld>
             <a:endParaRPr lang="LID4096"/>
           </a:p>
@@ -1627,7 +1627,7 @@
           <a:p>
             <a:fld id="{19CC64D6-7849-43A0-8B5C-E0A4D3B49E93}" type="datetimeFigureOut">
               <a:rPr lang="LID4096" smtClean="0"/>
-              <a:t>09/11/2025</a:t>
+              <a:t>09/18/2025</a:t>
             </a:fld>
             <a:endParaRPr lang="LID4096"/>
           </a:p>
@@ -1895,7 +1895,7 @@
           <a:p>
             <a:fld id="{19CC64D6-7849-43A0-8B5C-E0A4D3B49E93}" type="datetimeFigureOut">
               <a:rPr lang="LID4096" smtClean="0"/>
-              <a:t>09/11/2025</a:t>
+              <a:t>09/18/2025</a:t>
             </a:fld>
             <a:endParaRPr lang="LID4096"/>
           </a:p>
@@ -2310,7 +2310,7 @@
           <a:p>
             <a:fld id="{19CC64D6-7849-43A0-8B5C-E0A4D3B49E93}" type="datetimeFigureOut">
               <a:rPr lang="LID4096" smtClean="0"/>
-              <a:t>09/11/2025</a:t>
+              <a:t>09/18/2025</a:t>
             </a:fld>
             <a:endParaRPr lang="LID4096"/>
           </a:p>
@@ -2452,7 +2452,7 @@
           <a:p>
             <a:fld id="{19CC64D6-7849-43A0-8B5C-E0A4D3B49E93}" type="datetimeFigureOut">
               <a:rPr lang="LID4096" smtClean="0"/>
-              <a:t>09/11/2025</a:t>
+              <a:t>09/18/2025</a:t>
             </a:fld>
             <a:endParaRPr lang="LID4096"/>
           </a:p>
@@ -2565,7 +2565,7 @@
           <a:p>
             <a:fld id="{19CC64D6-7849-43A0-8B5C-E0A4D3B49E93}" type="datetimeFigureOut">
               <a:rPr lang="LID4096" smtClean="0"/>
-              <a:t>09/11/2025</a:t>
+              <a:t>09/18/2025</a:t>
             </a:fld>
             <a:endParaRPr lang="LID4096"/>
           </a:p>
@@ -2878,7 +2878,7 @@
           <a:p>
             <a:fld id="{19CC64D6-7849-43A0-8B5C-E0A4D3B49E93}" type="datetimeFigureOut">
               <a:rPr lang="LID4096" smtClean="0"/>
-              <a:t>09/11/2025</a:t>
+              <a:t>09/18/2025</a:t>
             </a:fld>
             <a:endParaRPr lang="LID4096"/>
           </a:p>
@@ -3167,7 +3167,7 @@
           <a:p>
             <a:fld id="{19CC64D6-7849-43A0-8B5C-E0A4D3B49E93}" type="datetimeFigureOut">
               <a:rPr lang="LID4096" smtClean="0"/>
-              <a:t>09/11/2025</a:t>
+              <a:t>09/18/2025</a:t>
             </a:fld>
             <a:endParaRPr lang="LID4096"/>
           </a:p>
@@ -3410,7 +3410,7 @@
           <a:p>
             <a:fld id="{19CC64D6-7849-43A0-8B5C-E0A4D3B49E93}" type="datetimeFigureOut">
               <a:rPr lang="LID4096" smtClean="0"/>
-              <a:t>09/11/2025</a:t>
+              <a:t>09/18/2025</a:t>
             </a:fld>
             <a:endParaRPr lang="LID4096"/>
           </a:p>
@@ -13414,10 +13414,10 @@
       </p:grpSpPr>
       <p:sp>
         <p:nvSpPr>
-          <p:cNvPr id="5" name="Прямоугольник 4">
+          <p:cNvPr id="9" name="Прямоугольник 8">
             <a:extLst>
               <a:ext uri="{FF2B5EF4-FFF2-40B4-BE49-F238E27FC236}">
-                <a16:creationId xmlns:a16="http://schemas.microsoft.com/office/drawing/2014/main" id="{0271FB24-ADAC-47A4-A09E-C86CD18925F1}"/>
+                <a16:creationId xmlns:a16="http://schemas.microsoft.com/office/drawing/2014/main" id="{CDD63E0D-3705-4CCD-A1BE-B61E152D1116}"/>
               </a:ext>
             </a:extLst>
           </p:cNvPr>
@@ -13426,8 +13426,8 @@
         </p:nvSpPr>
         <p:spPr>
           <a:xfrm>
-            <a:off x="766354" y="1028343"/>
-            <a:ext cx="10659292" cy="4920834"/>
+            <a:off x="339213" y="685401"/>
+            <a:ext cx="11513574" cy="923330"/>
           </a:xfrm>
           <a:prstGeom prst="rect">
             <a:avLst/>
@@ -13439,1175 +13439,1232 @@
           </a:bodyPr>
           <a:lstStyle/>
           <a:p>
+            <a:r>
+              <a:rPr lang="en-UM" b="1" dirty="0">
+                <a:latin typeface="Times New Roman" panose="02020603050405020304" pitchFamily="18" charset="0"/>
+                <a:cs typeface="Times New Roman" panose="02020603050405020304" pitchFamily="18" charset="0"/>
+              </a:rPr>
+              <a:t>1. </a:t>
+            </a:r>
+            <a:r>
+              <a:rPr lang="en-US" b="1" dirty="0" err="1">
+                <a:latin typeface="Times New Roman" panose="02020603050405020304" pitchFamily="18" charset="0"/>
+                <a:cs typeface="Times New Roman" panose="02020603050405020304" pitchFamily="18" charset="0"/>
+              </a:rPr>
+              <a:t>Ukraina</a:t>
+            </a:r>
+            <a:r>
+              <a:rPr lang="en-US" b="1" dirty="0">
+                <a:latin typeface="Times New Roman" panose="02020603050405020304" pitchFamily="18" charset="0"/>
+                <a:cs typeface="Times New Roman" panose="02020603050405020304" pitchFamily="18" charset="0"/>
+              </a:rPr>
+              <a:t>–Rossiya </a:t>
+            </a:r>
+            <a:r>
+              <a:rPr lang="en-US" b="1" dirty="0" err="1">
+                <a:latin typeface="Times New Roman" panose="02020603050405020304" pitchFamily="18" charset="0"/>
+                <a:cs typeface="Times New Roman" panose="02020603050405020304" pitchFamily="18" charset="0"/>
+              </a:rPr>
+              <a:t>chegarasida</a:t>
+            </a:r>
+            <a:r>
+              <a:rPr lang="en-US" b="1" dirty="0">
+                <a:latin typeface="Times New Roman" panose="02020603050405020304" pitchFamily="18" charset="0"/>
+                <a:cs typeface="Times New Roman" panose="02020603050405020304" pitchFamily="18" charset="0"/>
+              </a:rPr>
+              <a:t> </a:t>
+            </a:r>
+            <a:r>
+              <a:rPr lang="en-US" b="1" dirty="0" err="1">
+                <a:latin typeface="Times New Roman" panose="02020603050405020304" pitchFamily="18" charset="0"/>
+                <a:cs typeface="Times New Roman" panose="02020603050405020304" pitchFamily="18" charset="0"/>
+              </a:rPr>
+              <a:t>Ukraina</a:t>
+            </a:r>
+            <a:r>
+              <a:rPr lang="en-US" b="1" dirty="0">
+                <a:latin typeface="Times New Roman" panose="02020603050405020304" pitchFamily="18" charset="0"/>
+                <a:cs typeface="Times New Roman" panose="02020603050405020304" pitchFamily="18" charset="0"/>
+              </a:rPr>
+              <a:t> </a:t>
+            </a:r>
+            <a:r>
+              <a:rPr lang="en-US" b="1" dirty="0" err="1">
+                <a:latin typeface="Times New Roman" panose="02020603050405020304" pitchFamily="18" charset="0"/>
+                <a:cs typeface="Times New Roman" panose="02020603050405020304" pitchFamily="18" charset="0"/>
+              </a:rPr>
+              <a:t>droni</a:t>
+            </a:r>
+            <a:r>
+              <a:rPr lang="en-US" b="1" dirty="0">
+                <a:latin typeface="Times New Roman" panose="02020603050405020304" pitchFamily="18" charset="0"/>
+                <a:cs typeface="Times New Roman" panose="02020603050405020304" pitchFamily="18" charset="0"/>
+              </a:rPr>
+              <a:t> </a:t>
+            </a:r>
+            <a:r>
+              <a:rPr lang="en-US" b="1" dirty="0" err="1">
+                <a:latin typeface="Times New Roman" panose="02020603050405020304" pitchFamily="18" charset="0"/>
+                <a:cs typeface="Times New Roman" panose="02020603050405020304" pitchFamily="18" charset="0"/>
+              </a:rPr>
+              <a:t>hujumi</a:t>
+            </a:r>
+            <a:r>
+              <a:rPr lang="en-US" b="1" dirty="0">
+                <a:latin typeface="Times New Roman" panose="02020603050405020304" pitchFamily="18" charset="0"/>
+                <a:cs typeface="Times New Roman" panose="02020603050405020304" pitchFamily="18" charset="0"/>
+              </a:rPr>
+              <a:t> (</a:t>
+            </a:r>
+            <a:r>
+              <a:rPr lang="de-DE" dirty="0">
+                <a:latin typeface="Times New Roman" panose="02020603050405020304" pitchFamily="18" charset="0"/>
+                <a:cs typeface="Times New Roman" panose="02020603050405020304" pitchFamily="18" charset="0"/>
+              </a:rPr>
+              <a:t>September 18, 20254:40 AM GMT+5)</a:t>
+            </a:r>
+            <a:endParaRPr lang="en-US" b="1" dirty="0">
+              <a:latin typeface="Times New Roman" panose="02020603050405020304" pitchFamily="18" charset="0"/>
+              <a:cs typeface="Times New Roman" panose="02020603050405020304" pitchFamily="18" charset="0"/>
+            </a:endParaRPr>
+          </a:p>
+          <a:p>
             <a:pPr>
-              <a:lnSpc>
-                <a:spcPct val="150000"/>
-              </a:lnSpc>
-              <a:spcBef>
-                <a:spcPts val="600"/>
-              </a:spcBef>
+              <a:buFont typeface="Arial" panose="020B0604020202020204" pitchFamily="34" charset="0"/>
+              <a:buChar char="•"/>
             </a:pPr>
             <a:r>
-              <a:rPr lang="en-UM" b="1" dirty="0">
-                <a:latin typeface="Segoe UI Emoji" panose="020B0502040204020203" pitchFamily="34" charset="0"/>
-                <a:ea typeface="Times New Roman" panose="02020603050405020304" pitchFamily="18" charset="0"/>
-                <a:cs typeface="Segoe UI Emoji" panose="020B0502040204020203" pitchFamily="34" charset="0"/>
-              </a:rPr>
-              <a:t>🌍</a:t>
-            </a:r>
-            <a:r>
-              <a:rPr lang="en-UM" b="1" dirty="0">
-                <a:latin typeface="Times New Roman" panose="02020603050405020304" pitchFamily="18" charset="0"/>
-                <a:ea typeface="Times New Roman" panose="02020603050405020304" pitchFamily="18" charset="0"/>
-              </a:rPr>
-              <a:t> </a:t>
-            </a:r>
-            <a:r>
-              <a:rPr lang="en-US" b="1" dirty="0" err="1">
-                <a:latin typeface="Times New Roman" panose="02020603050405020304" pitchFamily="18" charset="0"/>
-                <a:ea typeface="Times New Roman" panose="02020603050405020304" pitchFamily="18" charset="0"/>
-              </a:rPr>
-              <a:t>Jahon</a:t>
-            </a:r>
-            <a:r>
-              <a:rPr lang="en-US" b="1" dirty="0">
-                <a:latin typeface="Times New Roman" panose="02020603050405020304" pitchFamily="18" charset="0"/>
-                <a:ea typeface="Times New Roman" panose="02020603050405020304" pitchFamily="18" charset="0"/>
-              </a:rPr>
-              <a:t> </a:t>
-            </a:r>
-            <a:r>
-              <a:rPr lang="en-US" b="1" dirty="0" err="1">
-                <a:latin typeface="Times New Roman" panose="02020603050405020304" pitchFamily="18" charset="0"/>
-                <a:ea typeface="Times New Roman" panose="02020603050405020304" pitchFamily="18" charset="0"/>
-              </a:rPr>
-              <a:t>harbiy-siyosiy</a:t>
-            </a:r>
-            <a:r>
-              <a:rPr lang="en-US" b="1" dirty="0">
-                <a:latin typeface="Times New Roman" panose="02020603050405020304" pitchFamily="18" charset="0"/>
-                <a:ea typeface="Times New Roman" panose="02020603050405020304" pitchFamily="18" charset="0"/>
-              </a:rPr>
-              <a:t> </a:t>
-            </a:r>
-            <a:r>
-              <a:rPr lang="en-US" b="1" dirty="0" err="1">
-                <a:latin typeface="Times New Roman" panose="02020603050405020304" pitchFamily="18" charset="0"/>
-                <a:ea typeface="Times New Roman" panose="02020603050405020304" pitchFamily="18" charset="0"/>
-              </a:rPr>
-              <a:t>holati</a:t>
-            </a:r>
-            <a:r>
-              <a:rPr lang="en-US" b="1" dirty="0">
-                <a:latin typeface="Times New Roman" panose="02020603050405020304" pitchFamily="18" charset="0"/>
-                <a:ea typeface="Times New Roman" panose="02020603050405020304" pitchFamily="18" charset="0"/>
-              </a:rPr>
-              <a:t> (10–11 </a:t>
-            </a:r>
-            <a:r>
-              <a:rPr lang="en-US" b="1" dirty="0" err="1">
-                <a:latin typeface="Times New Roman" panose="02020603050405020304" pitchFamily="18" charset="0"/>
-                <a:ea typeface="Times New Roman" panose="02020603050405020304" pitchFamily="18" charset="0"/>
-              </a:rPr>
-              <a:t>sentabr</a:t>
-            </a:r>
-            <a:r>
-              <a:rPr lang="en-US" b="1" dirty="0">
-                <a:latin typeface="Times New Roman" panose="02020603050405020304" pitchFamily="18" charset="0"/>
-                <a:ea typeface="Times New Roman" panose="02020603050405020304" pitchFamily="18" charset="0"/>
-              </a:rPr>
-              <a:t> 2025)</a:t>
+              <a:rPr lang="en-US" dirty="0">
+                <a:latin typeface="Times New Roman" panose="02020603050405020304" pitchFamily="18" charset="0"/>
+                <a:cs typeface="Times New Roman" panose="02020603050405020304" pitchFamily="18" charset="0"/>
+              </a:rPr>
+              <a:t>Belgorod </a:t>
+            </a:r>
+            <a:r>
+              <a:rPr lang="en-US" dirty="0" err="1">
+                <a:latin typeface="Times New Roman" panose="02020603050405020304" pitchFamily="18" charset="0"/>
+                <a:cs typeface="Times New Roman" panose="02020603050405020304" pitchFamily="18" charset="0"/>
+              </a:rPr>
+              <a:t>viloyati</a:t>
+            </a:r>
+            <a:r>
+              <a:rPr lang="en-US" dirty="0">
+                <a:latin typeface="Times New Roman" panose="02020603050405020304" pitchFamily="18" charset="0"/>
+                <a:cs typeface="Times New Roman" panose="02020603050405020304" pitchFamily="18" charset="0"/>
+              </a:rPr>
+              <a:t>, </a:t>
+            </a:r>
+            <a:r>
+              <a:rPr lang="en-US" dirty="0" err="1">
+                <a:latin typeface="Times New Roman" panose="02020603050405020304" pitchFamily="18" charset="0"/>
+                <a:cs typeface="Times New Roman" panose="02020603050405020304" pitchFamily="18" charset="0"/>
+              </a:rPr>
+              <a:t>Shebekino</a:t>
+            </a:r>
+            <a:r>
+              <a:rPr lang="en-US" dirty="0">
+                <a:latin typeface="Times New Roman" panose="02020603050405020304" pitchFamily="18" charset="0"/>
+                <a:cs typeface="Times New Roman" panose="02020603050405020304" pitchFamily="18" charset="0"/>
+              </a:rPr>
+              <a:t> </a:t>
+            </a:r>
+            <a:r>
+              <a:rPr lang="en-US" dirty="0" err="1">
+                <a:latin typeface="Times New Roman" panose="02020603050405020304" pitchFamily="18" charset="0"/>
+                <a:cs typeface="Times New Roman" panose="02020603050405020304" pitchFamily="18" charset="0"/>
+              </a:rPr>
+              <a:t>shahrida</a:t>
+            </a:r>
+            <a:r>
+              <a:rPr lang="en-US" dirty="0">
+                <a:latin typeface="Times New Roman" panose="02020603050405020304" pitchFamily="18" charset="0"/>
+                <a:cs typeface="Times New Roman" panose="02020603050405020304" pitchFamily="18" charset="0"/>
+              </a:rPr>
+              <a:t> </a:t>
+            </a:r>
+            <a:r>
+              <a:rPr lang="en-US" dirty="0" err="1">
+                <a:latin typeface="Times New Roman" panose="02020603050405020304" pitchFamily="18" charset="0"/>
+                <a:cs typeface="Times New Roman" panose="02020603050405020304" pitchFamily="18" charset="0"/>
+              </a:rPr>
+              <a:t>Ukraina</a:t>
+            </a:r>
+            <a:r>
+              <a:rPr lang="en-US" dirty="0">
+                <a:latin typeface="Times New Roman" panose="02020603050405020304" pitchFamily="18" charset="0"/>
+                <a:cs typeface="Times New Roman" panose="02020603050405020304" pitchFamily="18" charset="0"/>
+              </a:rPr>
+              <a:t> </a:t>
+            </a:r>
+            <a:r>
+              <a:rPr lang="en-US" dirty="0" err="1">
+                <a:latin typeface="Times New Roman" panose="02020603050405020304" pitchFamily="18" charset="0"/>
+                <a:cs typeface="Times New Roman" panose="02020603050405020304" pitchFamily="18" charset="0"/>
+              </a:rPr>
+              <a:t>droni</a:t>
+            </a:r>
+            <a:r>
+              <a:rPr lang="en-US" dirty="0">
+                <a:latin typeface="Times New Roman" panose="02020603050405020304" pitchFamily="18" charset="0"/>
+                <a:cs typeface="Times New Roman" panose="02020603050405020304" pitchFamily="18" charset="0"/>
+              </a:rPr>
+              <a:t> </a:t>
+            </a:r>
+            <a:r>
+              <a:rPr lang="en-US" dirty="0" err="1">
+                <a:latin typeface="Times New Roman" panose="02020603050405020304" pitchFamily="18" charset="0"/>
+                <a:cs typeface="Times New Roman" panose="02020603050405020304" pitchFamily="18" charset="0"/>
+              </a:rPr>
+              <a:t>bir</a:t>
+            </a:r>
+            <a:r>
+              <a:rPr lang="en-US" dirty="0">
+                <a:latin typeface="Times New Roman" panose="02020603050405020304" pitchFamily="18" charset="0"/>
+                <a:cs typeface="Times New Roman" panose="02020603050405020304" pitchFamily="18" charset="0"/>
+              </a:rPr>
+              <a:t> </a:t>
+            </a:r>
+            <a:r>
+              <a:rPr lang="en-US" dirty="0" err="1">
+                <a:latin typeface="Times New Roman" panose="02020603050405020304" pitchFamily="18" charset="0"/>
+                <a:cs typeface="Times New Roman" panose="02020603050405020304" pitchFamily="18" charset="0"/>
+              </a:rPr>
+              <a:t>kishini</a:t>
+            </a:r>
+            <a:r>
+              <a:rPr lang="en-US" dirty="0">
+                <a:latin typeface="Times New Roman" panose="02020603050405020304" pitchFamily="18" charset="0"/>
+                <a:cs typeface="Times New Roman" panose="02020603050405020304" pitchFamily="18" charset="0"/>
+              </a:rPr>
+              <a:t> </a:t>
+            </a:r>
+            <a:r>
+              <a:rPr lang="en-US" dirty="0" err="1">
+                <a:latin typeface="Times New Roman" panose="02020603050405020304" pitchFamily="18" charset="0"/>
+                <a:cs typeface="Times New Roman" panose="02020603050405020304" pitchFamily="18" charset="0"/>
+              </a:rPr>
+              <a:t>o‘ldirdi</a:t>
+            </a:r>
+            <a:r>
+              <a:rPr lang="en-US" dirty="0">
+                <a:latin typeface="Times New Roman" panose="02020603050405020304" pitchFamily="18" charset="0"/>
+                <a:cs typeface="Times New Roman" panose="02020603050405020304" pitchFamily="18" charset="0"/>
+              </a:rPr>
+              <a:t> </a:t>
+            </a:r>
+            <a:r>
+              <a:rPr lang="en-US" dirty="0" err="1">
+                <a:latin typeface="Times New Roman" panose="02020603050405020304" pitchFamily="18" charset="0"/>
+                <a:cs typeface="Times New Roman" panose="02020603050405020304" pitchFamily="18" charset="0"/>
+              </a:rPr>
+              <a:t>va</a:t>
+            </a:r>
+            <a:r>
+              <a:rPr lang="en-US" dirty="0">
+                <a:latin typeface="Times New Roman" panose="02020603050405020304" pitchFamily="18" charset="0"/>
+                <a:cs typeface="Times New Roman" panose="02020603050405020304" pitchFamily="18" charset="0"/>
+              </a:rPr>
+              <a:t> </a:t>
+            </a:r>
+            <a:r>
+              <a:rPr lang="en-US" dirty="0" err="1">
+                <a:latin typeface="Times New Roman" panose="02020603050405020304" pitchFamily="18" charset="0"/>
+                <a:cs typeface="Times New Roman" panose="02020603050405020304" pitchFamily="18" charset="0"/>
+              </a:rPr>
+              <a:t>birovni</a:t>
+            </a:r>
+            <a:r>
+              <a:rPr lang="en-US" dirty="0">
+                <a:latin typeface="Times New Roman" panose="02020603050405020304" pitchFamily="18" charset="0"/>
+                <a:cs typeface="Times New Roman" panose="02020603050405020304" pitchFamily="18" charset="0"/>
+              </a:rPr>
+              <a:t> </a:t>
+            </a:r>
+            <a:r>
+              <a:rPr lang="en-US" dirty="0" err="1">
+                <a:latin typeface="Times New Roman" panose="02020603050405020304" pitchFamily="18" charset="0"/>
+                <a:cs typeface="Times New Roman" panose="02020603050405020304" pitchFamily="18" charset="0"/>
+              </a:rPr>
+              <a:t>jarohatladı</a:t>
+            </a:r>
+            <a:r>
+              <a:rPr lang="en-US" dirty="0">
+                <a:latin typeface="Times New Roman" panose="02020603050405020304" pitchFamily="18" charset="0"/>
+                <a:cs typeface="Times New Roman" panose="02020603050405020304" pitchFamily="18" charset="0"/>
+              </a:rPr>
+              <a:t>. </a:t>
+            </a:r>
+            <a:r>
+              <a:rPr lang="en-US" dirty="0">
+                <a:latin typeface="Times New Roman" panose="02020603050405020304" pitchFamily="18" charset="0"/>
+                <a:cs typeface="Times New Roman" panose="02020603050405020304" pitchFamily="18" charset="0"/>
+                <a:hlinkClick r:id="rId2"/>
+              </a:rPr>
+              <a:t>Reuters</a:t>
             </a:r>
             <a:endParaRPr lang="en-US" dirty="0">
               <a:latin typeface="Times New Roman" panose="02020603050405020304" pitchFamily="18" charset="0"/>
-              <a:ea typeface="Times New Roman" panose="02020603050405020304" pitchFamily="18" charset="0"/>
+              <a:cs typeface="Times New Roman" panose="02020603050405020304" pitchFamily="18" charset="0"/>
             </a:endParaRPr>
           </a:p>
           <a:p>
-            <a:pPr marL="342900" lvl="0" indent="-342900" algn="just">
-              <a:lnSpc>
-                <a:spcPct val="150000"/>
-              </a:lnSpc>
-              <a:spcBef>
-                <a:spcPts val="600"/>
-              </a:spcBef>
-              <a:buSzPts val="1000"/>
-              <a:buFont typeface="Symbol" panose="05050102010706020507" pitchFamily="18" charset="2"/>
-              <a:buChar char=""/>
-              <a:tabLst>
-                <a:tab pos="457200" algn="l"/>
-              </a:tabLst>
+            <a:pPr>
+              <a:buFont typeface="Arial" panose="020B0604020202020204" pitchFamily="34" charset="0"/>
+              <a:buChar char="•"/>
             </a:pPr>
             <a:r>
+              <a:rPr lang="en-US" dirty="0">
+                <a:latin typeface="Times New Roman" panose="02020603050405020304" pitchFamily="18" charset="0"/>
+                <a:cs typeface="Times New Roman" panose="02020603050405020304" pitchFamily="18" charset="0"/>
+              </a:rPr>
+              <a:t>Bu hudud </a:t>
+            </a:r>
+            <a:r>
               <a:rPr lang="en-US" dirty="0" err="1">
                 <a:latin typeface="Times New Roman" panose="02020603050405020304" pitchFamily="18" charset="0"/>
-                <a:ea typeface="Times New Roman" panose="02020603050405020304" pitchFamily="18" charset="0"/>
-              </a:rPr>
-              <a:t>Polsha</a:t>
+                <a:cs typeface="Times New Roman" panose="02020603050405020304" pitchFamily="18" charset="0"/>
+              </a:rPr>
+              <a:t>chegara</a:t>
             </a:r>
             <a:r>
               <a:rPr lang="en-US" dirty="0">
                 <a:latin typeface="Times New Roman" panose="02020603050405020304" pitchFamily="18" charset="0"/>
-                <a:ea typeface="Times New Roman" panose="02020603050405020304" pitchFamily="18" charset="0"/>
+                <a:cs typeface="Times New Roman" panose="02020603050405020304" pitchFamily="18" charset="0"/>
               </a:rPr>
               <a:t> </a:t>
             </a:r>
             <a:r>
               <a:rPr lang="en-US" dirty="0" err="1">
                 <a:latin typeface="Times New Roman" panose="02020603050405020304" pitchFamily="18" charset="0"/>
-                <a:ea typeface="Times New Roman" panose="02020603050405020304" pitchFamily="18" charset="0"/>
-              </a:rPr>
-              <a:t>havo</a:t>
+                <a:cs typeface="Times New Roman" panose="02020603050405020304" pitchFamily="18" charset="0"/>
+              </a:rPr>
+              <a:t>bo‘lgani</a:t>
             </a:r>
             <a:r>
               <a:rPr lang="en-US" dirty="0">
                 <a:latin typeface="Times New Roman" panose="02020603050405020304" pitchFamily="18" charset="0"/>
-                <a:ea typeface="Times New Roman" panose="02020603050405020304" pitchFamily="18" charset="0"/>
+                <a:cs typeface="Times New Roman" panose="02020603050405020304" pitchFamily="18" charset="0"/>
               </a:rPr>
               <a:t> </a:t>
             </a:r>
             <a:r>
               <a:rPr lang="en-US" dirty="0" err="1">
                 <a:latin typeface="Times New Roman" panose="02020603050405020304" pitchFamily="18" charset="0"/>
-                <a:ea typeface="Times New Roman" panose="02020603050405020304" pitchFamily="18" charset="0"/>
-              </a:rPr>
-              <a:t>maydoniga</a:t>
+                <a:cs typeface="Times New Roman" panose="02020603050405020304" pitchFamily="18" charset="0"/>
+              </a:rPr>
+              <a:t>uchun</a:t>
             </a:r>
             <a:r>
               <a:rPr lang="en-US" dirty="0">
                 <a:latin typeface="Times New Roman" panose="02020603050405020304" pitchFamily="18" charset="0"/>
-                <a:ea typeface="Times New Roman" panose="02020603050405020304" pitchFamily="18" charset="0"/>
-              </a:rPr>
-              <a:t> 19 ta Rossiya </a:t>
+                <a:cs typeface="Times New Roman" panose="02020603050405020304" pitchFamily="18" charset="0"/>
+              </a:rPr>
+              <a:t> </a:t>
             </a:r>
             <a:r>
               <a:rPr lang="en-US" dirty="0" err="1">
                 <a:latin typeface="Times New Roman" panose="02020603050405020304" pitchFamily="18" charset="0"/>
-                <a:ea typeface="Times New Roman" panose="02020603050405020304" pitchFamily="18" charset="0"/>
-              </a:rPr>
-              <a:t>droni</a:t>
+                <a:cs typeface="Times New Roman" panose="02020603050405020304" pitchFamily="18" charset="0"/>
+              </a:rPr>
+              <a:t>vaziyat</a:t>
             </a:r>
             <a:r>
               <a:rPr lang="en-US" dirty="0">
                 <a:latin typeface="Times New Roman" panose="02020603050405020304" pitchFamily="18" charset="0"/>
-                <a:ea typeface="Times New Roman" panose="02020603050405020304" pitchFamily="18" charset="0"/>
+                <a:cs typeface="Times New Roman" panose="02020603050405020304" pitchFamily="18" charset="0"/>
               </a:rPr>
               <a:t> </a:t>
             </a:r>
             <a:r>
               <a:rPr lang="en-US" dirty="0" err="1">
                 <a:latin typeface="Times New Roman" panose="02020603050405020304" pitchFamily="18" charset="0"/>
-                <a:ea typeface="Times New Roman" panose="02020603050405020304" pitchFamily="18" charset="0"/>
-              </a:rPr>
-              <a:t>bostirib</a:t>
+                <a:cs typeface="Times New Roman" panose="02020603050405020304" pitchFamily="18" charset="0"/>
+              </a:rPr>
+              <a:t>kuchli</a:t>
             </a:r>
             <a:r>
               <a:rPr lang="en-US" dirty="0">
                 <a:latin typeface="Times New Roman" panose="02020603050405020304" pitchFamily="18" charset="0"/>
-                <a:ea typeface="Times New Roman" panose="02020603050405020304" pitchFamily="18" charset="0"/>
+                <a:cs typeface="Times New Roman" panose="02020603050405020304" pitchFamily="18" charset="0"/>
               </a:rPr>
               <a:t> </a:t>
             </a:r>
             <a:r>
               <a:rPr lang="en-US" dirty="0" err="1">
                 <a:latin typeface="Times New Roman" panose="02020603050405020304" pitchFamily="18" charset="0"/>
-                <a:ea typeface="Times New Roman" panose="02020603050405020304" pitchFamily="18" charset="0"/>
-              </a:rPr>
-              <a:t>kirishi</a:t>
+                <a:cs typeface="Times New Roman" panose="02020603050405020304" pitchFamily="18" charset="0"/>
+              </a:rPr>
+              <a:t>taranglikda</a:t>
             </a:r>
             <a:r>
               <a:rPr lang="en-US" dirty="0">
                 <a:latin typeface="Times New Roman" panose="02020603050405020304" pitchFamily="18" charset="0"/>
-                <a:ea typeface="Times New Roman" panose="02020603050405020304" pitchFamily="18" charset="0"/>
+                <a:cs typeface="Times New Roman" panose="02020603050405020304" pitchFamily="18" charset="0"/>
               </a:rPr>
               <a:t> </a:t>
             </a:r>
             <a:r>
               <a:rPr lang="en-US" dirty="0" err="1">
                 <a:latin typeface="Times New Roman" panose="02020603050405020304" pitchFamily="18" charset="0"/>
-                <a:ea typeface="Times New Roman" panose="02020603050405020304" pitchFamily="18" charset="0"/>
-              </a:rPr>
-              <a:t>sababli</a:t>
+                <a:cs typeface="Times New Roman" panose="02020603050405020304" pitchFamily="18" charset="0"/>
+              </a:rPr>
+              <a:t>qolmoqda</a:t>
             </a:r>
             <a:r>
               <a:rPr lang="en-US" dirty="0">
                 <a:latin typeface="Times New Roman" panose="02020603050405020304" pitchFamily="18" charset="0"/>
-                <a:ea typeface="Times New Roman" panose="02020603050405020304" pitchFamily="18" charset="0"/>
-              </a:rPr>
-              <a:t> </a:t>
+                <a:cs typeface="Times New Roman" panose="02020603050405020304" pitchFamily="18" charset="0"/>
+              </a:rPr>
+              <a:t>. </a:t>
+            </a:r>
+            <a:r>
+              <a:rPr lang="en-US" dirty="0">
+                <a:latin typeface="Times New Roman" panose="02020603050405020304" pitchFamily="18" charset="0"/>
+                <a:cs typeface="Times New Roman" panose="02020603050405020304" pitchFamily="18" charset="0"/>
+                <a:hlinkClick r:id="rId2"/>
+              </a:rPr>
+              <a:t>Reuters</a:t>
+            </a:r>
+            <a:endParaRPr lang="en-US" dirty="0">
+              <a:latin typeface="Times New Roman" panose="02020603050405020304" pitchFamily="18" charset="0"/>
+              <a:cs typeface="Times New Roman" panose="02020603050405020304" pitchFamily="18" charset="0"/>
+            </a:endParaRPr>
+          </a:p>
+        </p:txBody>
+      </p:sp>
+      <p:sp>
+        <p:nvSpPr>
+          <p:cNvPr id="10" name="Прямоугольник 9">
+            <a:extLst>
+              <a:ext uri="{FF2B5EF4-FFF2-40B4-BE49-F238E27FC236}">
+                <a16:creationId xmlns:a16="http://schemas.microsoft.com/office/drawing/2014/main" id="{71A7E39D-5614-4BAE-AF25-96707021EE34}"/>
+              </a:ext>
+            </a:extLst>
+          </p:cNvPr>
+          <p:cNvSpPr/>
+          <p:nvPr/>
+        </p:nvSpPr>
+        <p:spPr>
+          <a:xfrm>
+            <a:off x="339213" y="2162729"/>
+            <a:ext cx="11513574" cy="923330"/>
+          </a:xfrm>
+          <a:prstGeom prst="rect">
+            <a:avLst/>
+          </a:prstGeom>
+        </p:spPr>
+        <p:txBody>
+          <a:bodyPr wrap="square">
+            <a:spAutoFit/>
+          </a:bodyPr>
+          <a:lstStyle/>
+          <a:p>
+            <a:r>
+              <a:rPr lang="en-UM" b="1" dirty="0">
+                <a:latin typeface="Times New Roman" panose="02020603050405020304" pitchFamily="18" charset="0"/>
+                <a:cs typeface="Times New Roman" panose="02020603050405020304" pitchFamily="18" charset="0"/>
+              </a:rPr>
+              <a:t>2. </a:t>
+            </a:r>
+            <a:r>
+              <a:rPr lang="en-US" b="1" dirty="0" err="1">
+                <a:latin typeface="Times New Roman" panose="02020603050405020304" pitchFamily="18" charset="0"/>
+                <a:cs typeface="Times New Roman" panose="02020603050405020304" pitchFamily="18" charset="0"/>
+              </a:rPr>
+              <a:t>Kirovohrad</a:t>
+            </a:r>
+            <a:r>
+              <a:rPr lang="en-US" b="1" dirty="0">
+                <a:latin typeface="Times New Roman" panose="02020603050405020304" pitchFamily="18" charset="0"/>
+                <a:cs typeface="Times New Roman" panose="02020603050405020304" pitchFamily="18" charset="0"/>
+              </a:rPr>
+              <a:t> </a:t>
+            </a:r>
+            <a:r>
+              <a:rPr lang="en-US" b="1" dirty="0" err="1">
+                <a:latin typeface="Times New Roman" panose="02020603050405020304" pitchFamily="18" charset="0"/>
+                <a:cs typeface="Times New Roman" panose="02020603050405020304" pitchFamily="18" charset="0"/>
+              </a:rPr>
+              <a:t>viloyatidagi</a:t>
+            </a:r>
+            <a:r>
+              <a:rPr lang="en-US" b="1" dirty="0">
+                <a:latin typeface="Times New Roman" panose="02020603050405020304" pitchFamily="18" charset="0"/>
+                <a:cs typeface="Times New Roman" panose="02020603050405020304" pitchFamily="18" charset="0"/>
+              </a:rPr>
+              <a:t> </a:t>
+            </a:r>
+            <a:r>
+              <a:rPr lang="en-US" b="1" dirty="0" err="1">
+                <a:latin typeface="Times New Roman" panose="02020603050405020304" pitchFamily="18" charset="0"/>
+                <a:cs typeface="Times New Roman" panose="02020603050405020304" pitchFamily="18" charset="0"/>
+              </a:rPr>
+              <a:t>rossiyaliklar</a:t>
+            </a:r>
+            <a:r>
+              <a:rPr lang="en-US" b="1" dirty="0">
+                <a:latin typeface="Times New Roman" panose="02020603050405020304" pitchFamily="18" charset="0"/>
+                <a:cs typeface="Times New Roman" panose="02020603050405020304" pitchFamily="18" charset="0"/>
+              </a:rPr>
+              <a:t> </a:t>
+            </a:r>
+            <a:r>
+              <a:rPr lang="en-US" b="1" dirty="0" err="1">
+                <a:latin typeface="Times New Roman" panose="02020603050405020304" pitchFamily="18" charset="0"/>
+                <a:cs typeface="Times New Roman" panose="02020603050405020304" pitchFamily="18" charset="0"/>
+              </a:rPr>
+              <a:t>hujumi</a:t>
+            </a:r>
+            <a:r>
+              <a:rPr lang="en-US" b="1" dirty="0">
+                <a:latin typeface="Times New Roman" panose="02020603050405020304" pitchFamily="18" charset="0"/>
+                <a:cs typeface="Times New Roman" panose="02020603050405020304" pitchFamily="18" charset="0"/>
+              </a:rPr>
+              <a:t> (</a:t>
+            </a:r>
+            <a:r>
+              <a:rPr lang="de-DE" dirty="0">
+                <a:latin typeface="Times New Roman" panose="02020603050405020304" pitchFamily="18" charset="0"/>
+                <a:cs typeface="Times New Roman" panose="02020603050405020304" pitchFamily="18" charset="0"/>
+              </a:rPr>
+              <a:t>September 17, 202510:36 AM GMT+5)</a:t>
+            </a:r>
+            <a:endParaRPr lang="en-US" b="1" dirty="0">
+              <a:latin typeface="Times New Roman" panose="02020603050405020304" pitchFamily="18" charset="0"/>
+              <a:cs typeface="Times New Roman" panose="02020603050405020304" pitchFamily="18" charset="0"/>
+            </a:endParaRPr>
+          </a:p>
+          <a:p>
+            <a:pPr>
+              <a:buFont typeface="Arial" panose="020B0604020202020204" pitchFamily="34" charset="0"/>
+              <a:buChar char="•"/>
+            </a:pPr>
+            <a:r>
+              <a:rPr lang="en-US" dirty="0">
+                <a:latin typeface="Times New Roman" panose="02020603050405020304" pitchFamily="18" charset="0"/>
+                <a:cs typeface="Times New Roman" panose="02020603050405020304" pitchFamily="18" charset="0"/>
+              </a:rPr>
+              <a:t>Rossiya </a:t>
             </a:r>
             <a:r>
               <a:rPr lang="en-US" dirty="0" err="1">
                 <a:latin typeface="Times New Roman" panose="02020603050405020304" pitchFamily="18" charset="0"/>
-                <a:ea typeface="Times New Roman" panose="02020603050405020304" pitchFamily="18" charset="0"/>
-              </a:rPr>
-              <a:t>NATOning</a:t>
+                <a:cs typeface="Times New Roman" panose="02020603050405020304" pitchFamily="18" charset="0"/>
+              </a:rPr>
+              <a:t>kechasi</a:t>
             </a:r>
             <a:r>
               <a:rPr lang="en-US" dirty="0">
                 <a:latin typeface="Times New Roman" panose="02020603050405020304" pitchFamily="18" charset="0"/>
-                <a:ea typeface="Times New Roman" panose="02020603050405020304" pitchFamily="18" charset="0"/>
-              </a:rPr>
-              <a:t> 4-moddasi </a:t>
+                <a:cs typeface="Times New Roman" panose="02020603050405020304" pitchFamily="18" charset="0"/>
+              </a:rPr>
+              <a:t> </a:t>
             </a:r>
             <a:r>
               <a:rPr lang="en-US" dirty="0" err="1">
                 <a:latin typeface="Times New Roman" panose="02020603050405020304" pitchFamily="18" charset="0"/>
-                <a:ea typeface="Times New Roman" panose="02020603050405020304" pitchFamily="18" charset="0"/>
-              </a:rPr>
-              <a:t>bo‘yicha</a:t>
+                <a:cs typeface="Times New Roman" panose="02020603050405020304" pitchFamily="18" charset="0"/>
+              </a:rPr>
+              <a:t>dronlar</a:t>
             </a:r>
             <a:r>
               <a:rPr lang="en-US" dirty="0">
                 <a:latin typeface="Times New Roman" panose="02020603050405020304" pitchFamily="18" charset="0"/>
-                <a:ea typeface="Times New Roman" panose="02020603050405020304" pitchFamily="18" charset="0"/>
+                <a:cs typeface="Times New Roman" panose="02020603050405020304" pitchFamily="18" charset="0"/>
               </a:rPr>
               <a:t> </a:t>
             </a:r>
             <a:r>
               <a:rPr lang="en-US" dirty="0" err="1">
                 <a:latin typeface="Times New Roman" panose="02020603050405020304" pitchFamily="18" charset="0"/>
-                <a:ea typeface="Times New Roman" panose="02020603050405020304" pitchFamily="18" charset="0"/>
-              </a:rPr>
-              <a:t>maslahat</a:t>
+                <a:cs typeface="Times New Roman" panose="02020603050405020304" pitchFamily="18" charset="0"/>
+              </a:rPr>
+              <a:t>bilan</a:t>
             </a:r>
             <a:r>
               <a:rPr lang="en-US" dirty="0">
                 <a:latin typeface="Times New Roman" panose="02020603050405020304" pitchFamily="18" charset="0"/>
-                <a:ea typeface="Times New Roman" panose="02020603050405020304" pitchFamily="18" charset="0"/>
+                <a:cs typeface="Times New Roman" panose="02020603050405020304" pitchFamily="18" charset="0"/>
               </a:rPr>
               <a:t> </a:t>
             </a:r>
             <a:r>
               <a:rPr lang="en-US" dirty="0" err="1">
                 <a:latin typeface="Times New Roman" panose="02020603050405020304" pitchFamily="18" charset="0"/>
-                <a:ea typeface="Times New Roman" panose="02020603050405020304" pitchFamily="18" charset="0"/>
-              </a:rPr>
-              <a:t>chaqirildi</a:t>
+                <a:cs typeface="Times New Roman" panose="02020603050405020304" pitchFamily="18" charset="0"/>
+              </a:rPr>
+              <a:t>hujum</a:t>
             </a:r>
             <a:r>
               <a:rPr lang="en-US" dirty="0">
                 <a:latin typeface="Times New Roman" panose="02020603050405020304" pitchFamily="18" charset="0"/>
-                <a:ea typeface="Times New Roman" panose="02020603050405020304" pitchFamily="18" charset="0"/>
-              </a:rPr>
-              <a:t>; </a:t>
+                <a:cs typeface="Times New Roman" panose="02020603050405020304" pitchFamily="18" charset="0"/>
+              </a:rPr>
+              <a:t> </a:t>
             </a:r>
             <a:r>
               <a:rPr lang="en-US" dirty="0" err="1">
                 <a:latin typeface="Times New Roman" panose="02020603050405020304" pitchFamily="18" charset="0"/>
-                <a:ea typeface="Times New Roman" panose="02020603050405020304" pitchFamily="18" charset="0"/>
-              </a:rPr>
-              <a:t>bir</a:t>
+                <a:cs typeface="Times New Roman" panose="02020603050405020304" pitchFamily="18" charset="0"/>
+              </a:rPr>
+              <a:t>qilib</a:t>
             </a:r>
             <a:r>
               <a:rPr lang="en-US" dirty="0">
                 <a:latin typeface="Times New Roman" panose="02020603050405020304" pitchFamily="18" charset="0"/>
-                <a:ea typeface="Times New Roman" panose="02020603050405020304" pitchFamily="18" charset="0"/>
-              </a:rPr>
-              <a:t> </a:t>
+                <a:cs typeface="Times New Roman" panose="02020603050405020304" pitchFamily="18" charset="0"/>
+              </a:rPr>
+              <a:t>, </a:t>
             </a:r>
             <a:r>
               <a:rPr lang="en-US" dirty="0" err="1">
                 <a:latin typeface="Times New Roman" panose="02020603050405020304" pitchFamily="18" charset="0"/>
-                <a:ea typeface="Times New Roman" panose="02020603050405020304" pitchFamily="18" charset="0"/>
-              </a:rPr>
-              <a:t>nechta</a:t>
+                <a:cs typeface="Times New Roman" panose="02020603050405020304" pitchFamily="18" charset="0"/>
+              </a:rPr>
+              <a:t>Kirovohrad</a:t>
             </a:r>
             <a:r>
               <a:rPr lang="en-US" dirty="0">
                 <a:latin typeface="Times New Roman" panose="02020603050405020304" pitchFamily="18" charset="0"/>
-                <a:ea typeface="Times New Roman" panose="02020603050405020304" pitchFamily="18" charset="0"/>
+                <a:cs typeface="Times New Roman" panose="02020603050405020304" pitchFamily="18" charset="0"/>
               </a:rPr>
               <a:t> </a:t>
             </a:r>
             <a:r>
               <a:rPr lang="en-US" dirty="0" err="1">
                 <a:latin typeface="Times New Roman" panose="02020603050405020304" pitchFamily="18" charset="0"/>
-                <a:ea typeface="Times New Roman" panose="02020603050405020304" pitchFamily="18" charset="0"/>
-              </a:rPr>
-              <a:t>dronlar</a:t>
+                <a:cs typeface="Times New Roman" panose="02020603050405020304" pitchFamily="18" charset="0"/>
+              </a:rPr>
+              <a:t>viloyatida</a:t>
             </a:r>
             <a:r>
               <a:rPr lang="en-US" dirty="0">
                 <a:latin typeface="Times New Roman" panose="02020603050405020304" pitchFamily="18" charset="0"/>
-                <a:ea typeface="Times New Roman" panose="02020603050405020304" pitchFamily="18" charset="0"/>
+                <a:cs typeface="Times New Roman" panose="02020603050405020304" pitchFamily="18" charset="0"/>
               </a:rPr>
               <a:t> </a:t>
             </a:r>
             <a:r>
               <a:rPr lang="en-US" dirty="0" err="1">
                 <a:latin typeface="Times New Roman" panose="02020603050405020304" pitchFamily="18" charset="0"/>
-                <a:ea typeface="Times New Roman" panose="02020603050405020304" pitchFamily="18" charset="0"/>
-              </a:rPr>
-              <a:t>yo‘q</a:t>
+                <a:cs typeface="Times New Roman" panose="02020603050405020304" pitchFamily="18" charset="0"/>
+              </a:rPr>
+              <a:t>elektr</a:t>
             </a:r>
             <a:r>
               <a:rPr lang="en-US" dirty="0">
                 <a:latin typeface="Times New Roman" panose="02020603050405020304" pitchFamily="18" charset="0"/>
-                <a:ea typeface="Times New Roman" panose="02020603050405020304" pitchFamily="18" charset="0"/>
+                <a:cs typeface="Times New Roman" panose="02020603050405020304" pitchFamily="18" charset="0"/>
               </a:rPr>
               <a:t> </a:t>
             </a:r>
             <a:r>
               <a:rPr lang="en-US" dirty="0" err="1">
                 <a:latin typeface="Times New Roman" panose="02020603050405020304" pitchFamily="18" charset="0"/>
-                <a:ea typeface="Times New Roman" panose="02020603050405020304" pitchFamily="18" charset="0"/>
-              </a:rPr>
-              <a:t>qilindi</a:t>
+                <a:cs typeface="Times New Roman" panose="02020603050405020304" pitchFamily="18" charset="0"/>
+              </a:rPr>
+              <a:t>ta’minoti</a:t>
             </a:r>
             <a:r>
               <a:rPr lang="en-US" dirty="0">
                 <a:latin typeface="Times New Roman" panose="02020603050405020304" pitchFamily="18" charset="0"/>
-                <a:ea typeface="Times New Roman" panose="02020603050405020304" pitchFamily="18" charset="0"/>
+                <a:cs typeface="Times New Roman" panose="02020603050405020304" pitchFamily="18" charset="0"/>
+              </a:rPr>
+              <a:t> </a:t>
+            </a:r>
+            <a:r>
+              <a:rPr lang="en-US" dirty="0" err="1">
+                <a:latin typeface="Times New Roman" panose="02020603050405020304" pitchFamily="18" charset="0"/>
+                <a:cs typeface="Times New Roman" panose="02020603050405020304" pitchFamily="18" charset="0"/>
+              </a:rPr>
+              <a:t>uzib</a:t>
+            </a:r>
+            <a:r>
+              <a:rPr lang="en-US" dirty="0">
+                <a:latin typeface="Times New Roman" panose="02020603050405020304" pitchFamily="18" charset="0"/>
+                <a:cs typeface="Times New Roman" panose="02020603050405020304" pitchFamily="18" charset="0"/>
+              </a:rPr>
+              <a:t> </a:t>
+            </a:r>
+            <a:r>
+              <a:rPr lang="en-US" dirty="0" err="1">
+                <a:latin typeface="Times New Roman" panose="02020603050405020304" pitchFamily="18" charset="0"/>
+                <a:cs typeface="Times New Roman" panose="02020603050405020304" pitchFamily="18" charset="0"/>
+              </a:rPr>
+              <a:t>qo‘yildi</a:t>
+            </a:r>
+            <a:r>
+              <a:rPr lang="en-US" dirty="0">
+                <a:latin typeface="Times New Roman" panose="02020603050405020304" pitchFamily="18" charset="0"/>
+                <a:cs typeface="Times New Roman" panose="02020603050405020304" pitchFamily="18" charset="0"/>
+              </a:rPr>
+              <a:t> </a:t>
+            </a:r>
+            <a:r>
+              <a:rPr lang="en-US" dirty="0" err="1">
+                <a:latin typeface="Times New Roman" panose="02020603050405020304" pitchFamily="18" charset="0"/>
+                <a:cs typeface="Times New Roman" panose="02020603050405020304" pitchFamily="18" charset="0"/>
+              </a:rPr>
+              <a:t>va</a:t>
+            </a:r>
+            <a:r>
+              <a:rPr lang="en-US" dirty="0">
+                <a:latin typeface="Times New Roman" panose="02020603050405020304" pitchFamily="18" charset="0"/>
+                <a:cs typeface="Times New Roman" panose="02020603050405020304" pitchFamily="18" charset="0"/>
+              </a:rPr>
+              <a:t> </a:t>
+            </a:r>
+            <a:r>
+              <a:rPr lang="en-US" dirty="0" err="1">
+                <a:latin typeface="Times New Roman" panose="02020603050405020304" pitchFamily="18" charset="0"/>
+                <a:cs typeface="Times New Roman" panose="02020603050405020304" pitchFamily="18" charset="0"/>
+              </a:rPr>
+              <a:t>temiryo‘l</a:t>
+            </a:r>
+            <a:r>
+              <a:rPr lang="en-US" dirty="0">
+                <a:latin typeface="Times New Roman" panose="02020603050405020304" pitchFamily="18" charset="0"/>
+                <a:cs typeface="Times New Roman" panose="02020603050405020304" pitchFamily="18" charset="0"/>
+              </a:rPr>
+              <a:t> </a:t>
+            </a:r>
+            <a:r>
+              <a:rPr lang="en-US" dirty="0" err="1">
+                <a:latin typeface="Times New Roman" panose="02020603050405020304" pitchFamily="18" charset="0"/>
+                <a:cs typeface="Times New Roman" panose="02020603050405020304" pitchFamily="18" charset="0"/>
+              </a:rPr>
+              <a:t>aloqalari</a:t>
+            </a:r>
+            <a:r>
+              <a:rPr lang="en-US" dirty="0">
+                <a:latin typeface="Times New Roman" panose="02020603050405020304" pitchFamily="18" charset="0"/>
+                <a:cs typeface="Times New Roman" panose="02020603050405020304" pitchFamily="18" charset="0"/>
+              </a:rPr>
+              <a:t> </a:t>
+            </a:r>
+            <a:r>
+              <a:rPr lang="en-US" dirty="0" err="1">
+                <a:latin typeface="Times New Roman" panose="02020603050405020304" pitchFamily="18" charset="0"/>
+                <a:cs typeface="Times New Roman" panose="02020603050405020304" pitchFamily="18" charset="0"/>
+              </a:rPr>
+              <a:t>buzildi</a:t>
+            </a:r>
+            <a:r>
+              <a:rPr lang="en-US" dirty="0">
+                <a:latin typeface="Times New Roman" panose="02020603050405020304" pitchFamily="18" charset="0"/>
+                <a:cs typeface="Times New Roman" panose="02020603050405020304" pitchFamily="18" charset="0"/>
               </a:rPr>
               <a:t>. </a:t>
             </a:r>
-          </a:p>
-          <a:p>
-            <a:pPr marL="342900" lvl="0" indent="-342900" algn="just">
-              <a:lnSpc>
-                <a:spcPct val="150000"/>
-              </a:lnSpc>
-              <a:spcBef>
-                <a:spcPts val="600"/>
-              </a:spcBef>
-              <a:buSzPts val="1000"/>
-              <a:buFont typeface="Symbol" panose="05050102010706020507" pitchFamily="18" charset="2"/>
-              <a:buChar char=""/>
-              <a:tabLst>
-                <a:tab pos="457200" algn="l"/>
-              </a:tabLst>
+            <a:r>
+              <a:rPr lang="en-US" dirty="0">
+                <a:latin typeface="Times New Roman" panose="02020603050405020304" pitchFamily="18" charset="0"/>
+                <a:cs typeface="Times New Roman" panose="02020603050405020304" pitchFamily="18" charset="0"/>
+                <a:hlinkClick r:id="rId3"/>
+              </a:rPr>
+              <a:t>Reuters</a:t>
+            </a:r>
+            <a:endParaRPr lang="en-US" dirty="0">
+              <a:latin typeface="Times New Roman" panose="02020603050405020304" pitchFamily="18" charset="0"/>
+              <a:cs typeface="Times New Roman" panose="02020603050405020304" pitchFamily="18" charset="0"/>
+            </a:endParaRPr>
+          </a:p>
+        </p:txBody>
+      </p:sp>
+      <p:sp>
+        <p:nvSpPr>
+          <p:cNvPr id="11" name="Прямоугольник 10">
+            <a:extLst>
+              <a:ext uri="{FF2B5EF4-FFF2-40B4-BE49-F238E27FC236}">
+                <a16:creationId xmlns:a16="http://schemas.microsoft.com/office/drawing/2014/main" id="{0A63266C-A777-414E-9985-1ED5CCDDA2BD}"/>
+              </a:ext>
+            </a:extLst>
+          </p:cNvPr>
+          <p:cNvSpPr/>
+          <p:nvPr/>
+        </p:nvSpPr>
+        <p:spPr>
+          <a:xfrm>
+            <a:off x="339213" y="3968135"/>
+            <a:ext cx="11513574" cy="1477328"/>
+          </a:xfrm>
+          <a:prstGeom prst="rect">
+            <a:avLst/>
+          </a:prstGeom>
+        </p:spPr>
+        <p:txBody>
+          <a:bodyPr wrap="square">
+            <a:spAutoFit/>
+          </a:bodyPr>
+          <a:lstStyle/>
+          <a:p>
+            <a:r>
+              <a:rPr lang="en-UM" b="1" dirty="0">
+                <a:latin typeface="Times New Roman" panose="02020603050405020304" pitchFamily="18" charset="0"/>
+                <a:cs typeface="Times New Roman" panose="02020603050405020304" pitchFamily="18" charset="0"/>
+              </a:rPr>
+              <a:t>3. </a:t>
+            </a:r>
+            <a:r>
+              <a:rPr lang="en-US" b="1" dirty="0" err="1">
+                <a:latin typeface="Times New Roman" panose="02020603050405020304" pitchFamily="18" charset="0"/>
+                <a:cs typeface="Times New Roman" panose="02020603050405020304" pitchFamily="18" charset="0"/>
+              </a:rPr>
+              <a:t>Xitoy</a:t>
+            </a:r>
+            <a:r>
+              <a:rPr lang="en-US" b="1" dirty="0">
+                <a:latin typeface="Times New Roman" panose="02020603050405020304" pitchFamily="18" charset="0"/>
+                <a:cs typeface="Times New Roman" panose="02020603050405020304" pitchFamily="18" charset="0"/>
+              </a:rPr>
+              <a:t> </a:t>
+            </a:r>
+            <a:r>
+              <a:rPr lang="en-US" b="1" dirty="0" err="1">
+                <a:latin typeface="Times New Roman" panose="02020603050405020304" pitchFamily="18" charset="0"/>
+                <a:cs typeface="Times New Roman" panose="02020603050405020304" pitchFamily="18" charset="0"/>
+              </a:rPr>
+              <a:t>mudofaa</a:t>
+            </a:r>
+            <a:r>
+              <a:rPr lang="en-US" b="1" dirty="0">
+                <a:latin typeface="Times New Roman" panose="02020603050405020304" pitchFamily="18" charset="0"/>
+                <a:cs typeface="Times New Roman" panose="02020603050405020304" pitchFamily="18" charset="0"/>
+              </a:rPr>
+              <a:t> </a:t>
+            </a:r>
+            <a:r>
+              <a:rPr lang="en-US" b="1" dirty="0" err="1">
+                <a:latin typeface="Times New Roman" panose="02020603050405020304" pitchFamily="18" charset="0"/>
+                <a:cs typeface="Times New Roman" panose="02020603050405020304" pitchFamily="18" charset="0"/>
+              </a:rPr>
+              <a:t>vaziri</a:t>
+            </a:r>
+            <a:r>
+              <a:rPr lang="en-US" b="1" dirty="0">
+                <a:latin typeface="Times New Roman" panose="02020603050405020304" pitchFamily="18" charset="0"/>
+                <a:cs typeface="Times New Roman" panose="02020603050405020304" pitchFamily="18" charset="0"/>
+              </a:rPr>
+              <a:t> Dong Jun (“</a:t>
+            </a:r>
+            <a:r>
+              <a:rPr lang="en-US" b="1" dirty="0" err="1">
+                <a:latin typeface="Times New Roman" panose="02020603050405020304" pitchFamily="18" charset="0"/>
+                <a:cs typeface="Times New Roman" panose="02020603050405020304" pitchFamily="18" charset="0"/>
+              </a:rPr>
+              <a:t>Xiangshan</a:t>
+            </a:r>
+            <a:r>
+              <a:rPr lang="en-US" b="1" dirty="0">
+                <a:latin typeface="Times New Roman" panose="02020603050405020304" pitchFamily="18" charset="0"/>
+                <a:cs typeface="Times New Roman" panose="02020603050405020304" pitchFamily="18" charset="0"/>
+              </a:rPr>
+              <a:t>” </a:t>
+            </a:r>
+            <a:r>
+              <a:rPr lang="en-US" b="1" dirty="0" err="1">
+                <a:latin typeface="Times New Roman" panose="02020603050405020304" pitchFamily="18" charset="0"/>
+                <a:cs typeface="Times New Roman" panose="02020603050405020304" pitchFamily="18" charset="0"/>
+              </a:rPr>
+              <a:t>forumida</a:t>
+            </a:r>
+            <a:r>
+              <a:rPr lang="en-US" b="1" dirty="0">
+                <a:latin typeface="Times New Roman" panose="02020603050405020304" pitchFamily="18" charset="0"/>
+                <a:cs typeface="Times New Roman" panose="02020603050405020304" pitchFamily="18" charset="0"/>
+              </a:rPr>
+              <a:t>) (</a:t>
+            </a:r>
+            <a:r>
+              <a:rPr lang="de-DE" dirty="0">
+                <a:latin typeface="Times New Roman" panose="02020603050405020304" pitchFamily="18" charset="0"/>
+                <a:cs typeface="Times New Roman" panose="02020603050405020304" pitchFamily="18" charset="0"/>
+              </a:rPr>
+              <a:t>September 18, 20257:38 AM GMT+5)</a:t>
+            </a:r>
+            <a:endParaRPr lang="en-US" b="1" dirty="0">
+              <a:latin typeface="Times New Roman" panose="02020603050405020304" pitchFamily="18" charset="0"/>
+              <a:cs typeface="Times New Roman" panose="02020603050405020304" pitchFamily="18" charset="0"/>
+            </a:endParaRPr>
+          </a:p>
+          <a:p>
+            <a:pPr>
+              <a:buFont typeface="Arial" panose="020B0604020202020204" pitchFamily="34" charset="0"/>
+              <a:buChar char="•"/>
             </a:pPr>
             <a:r>
               <a:rPr lang="en-US" dirty="0">
                 <a:latin typeface="Times New Roman" panose="02020603050405020304" pitchFamily="18" charset="0"/>
-                <a:ea typeface="Times New Roman" panose="02020603050405020304" pitchFamily="18" charset="0"/>
-              </a:rPr>
-              <a:t>Rossiya </a:t>
+                <a:cs typeface="Times New Roman" panose="02020603050405020304" pitchFamily="18" charset="0"/>
+              </a:rPr>
+              <a:t>U global </a:t>
             </a:r>
             <a:r>
               <a:rPr lang="en-US" dirty="0" err="1">
                 <a:latin typeface="Times New Roman" panose="02020603050405020304" pitchFamily="18" charset="0"/>
-                <a:ea typeface="Times New Roman" panose="02020603050405020304" pitchFamily="18" charset="0"/>
-              </a:rPr>
-              <a:t>va</a:t>
+                <a:cs typeface="Times New Roman" panose="02020603050405020304" pitchFamily="18" charset="0"/>
+              </a:rPr>
+              <a:t>birdamlik</a:t>
             </a:r>
             <a:r>
               <a:rPr lang="en-US" dirty="0">
                 <a:latin typeface="Times New Roman" panose="02020603050405020304" pitchFamily="18" charset="0"/>
-                <a:ea typeface="Times New Roman" panose="02020603050405020304" pitchFamily="18" charset="0"/>
-              </a:rPr>
-              <a:t> Belarus “</a:t>
+                <a:cs typeface="Times New Roman" panose="02020603050405020304" pitchFamily="18" charset="0"/>
+              </a:rPr>
+              <a:t> </a:t>
             </a:r>
             <a:r>
               <a:rPr lang="en-US" dirty="0" err="1">
                 <a:latin typeface="Times New Roman" panose="02020603050405020304" pitchFamily="18" charset="0"/>
-                <a:ea typeface="Times New Roman" panose="02020603050405020304" pitchFamily="18" charset="0"/>
-              </a:rPr>
-              <a:t>Zapad</a:t>
+                <a:cs typeface="Times New Roman" panose="02020603050405020304" pitchFamily="18" charset="0"/>
+              </a:rPr>
+              <a:t>zaruriyatini</a:t>
             </a:r>
             <a:r>
               <a:rPr lang="en-US" dirty="0">
                 <a:latin typeface="Times New Roman" panose="02020603050405020304" pitchFamily="18" charset="0"/>
-                <a:ea typeface="Times New Roman" panose="02020603050405020304" pitchFamily="18" charset="0"/>
-              </a:rPr>
-              <a:t> 2025” </a:t>
+                <a:cs typeface="Times New Roman" panose="02020603050405020304" pitchFamily="18" charset="0"/>
+              </a:rPr>
+              <a:t> </a:t>
             </a:r>
             <a:r>
               <a:rPr lang="en-US" dirty="0" err="1">
                 <a:latin typeface="Times New Roman" panose="02020603050405020304" pitchFamily="18" charset="0"/>
-                <a:ea typeface="Times New Roman" panose="02020603050405020304" pitchFamily="18" charset="0"/>
-              </a:rPr>
-              <a:t>nomli</a:t>
+                <a:cs typeface="Times New Roman" panose="02020603050405020304" pitchFamily="18" charset="0"/>
+              </a:rPr>
+              <a:t>ta’kidladi</a:t>
             </a:r>
             <a:r>
               <a:rPr lang="en-US" dirty="0">
                 <a:latin typeface="Times New Roman" panose="02020603050405020304" pitchFamily="18" charset="0"/>
-                <a:ea typeface="Times New Roman" panose="02020603050405020304" pitchFamily="18" charset="0"/>
-              </a:rPr>
-              <a:t> </a:t>
+                <a:cs typeface="Times New Roman" panose="02020603050405020304" pitchFamily="18" charset="0"/>
+              </a:rPr>
+              <a:t>, "</a:t>
             </a:r>
             <a:r>
               <a:rPr lang="en-US" dirty="0" err="1">
                 <a:latin typeface="Times New Roman" panose="02020603050405020304" pitchFamily="18" charset="0"/>
-                <a:ea typeface="Times New Roman" panose="02020603050405020304" pitchFamily="18" charset="0"/>
-              </a:rPr>
-              <a:t>qo‘shma</a:t>
+                <a:cs typeface="Times New Roman" panose="02020603050405020304" pitchFamily="18" charset="0"/>
+              </a:rPr>
+              <a:t>jungl</a:t>
             </a:r>
             <a:r>
               <a:rPr lang="en-US" dirty="0">
                 <a:latin typeface="Times New Roman" panose="02020603050405020304" pitchFamily="18" charset="0"/>
-                <a:ea typeface="Times New Roman" panose="02020603050405020304" pitchFamily="18" charset="0"/>
+                <a:cs typeface="Times New Roman" panose="02020603050405020304" pitchFamily="18" charset="0"/>
               </a:rPr>
               <a:t> </a:t>
             </a:r>
             <a:r>
               <a:rPr lang="en-US" dirty="0" err="1">
                 <a:latin typeface="Times New Roman" panose="02020603050405020304" pitchFamily="18" charset="0"/>
-                <a:ea typeface="Times New Roman" panose="02020603050405020304" pitchFamily="18" charset="0"/>
-              </a:rPr>
-              <a:t>harbiy</a:t>
+                <a:cs typeface="Times New Roman" panose="02020603050405020304" pitchFamily="18" charset="0"/>
+              </a:rPr>
+              <a:t>qonuni</a:t>
             </a:r>
             <a:r>
               <a:rPr lang="en-US" dirty="0">
                 <a:latin typeface="Times New Roman" panose="02020603050405020304" pitchFamily="18" charset="0"/>
-                <a:ea typeface="Times New Roman" panose="02020603050405020304" pitchFamily="18" charset="0"/>
-              </a:rPr>
-              <a:t> </a:t>
+                <a:cs typeface="Times New Roman" panose="02020603050405020304" pitchFamily="18" charset="0"/>
+              </a:rPr>
+              <a:t>" (</a:t>
             </a:r>
             <a:r>
               <a:rPr lang="en-US" dirty="0" err="1">
                 <a:latin typeface="Times New Roman" panose="02020603050405020304" pitchFamily="18" charset="0"/>
-                <a:ea typeface="Times New Roman" panose="02020603050405020304" pitchFamily="18" charset="0"/>
-              </a:rPr>
-              <a:t>mashqlarini</a:t>
+                <a:cs typeface="Times New Roman" panose="02020603050405020304" pitchFamily="18" charset="0"/>
+              </a:rPr>
+              <a:t>kuch-asosida</a:t>
             </a:r>
             <a:r>
               <a:rPr lang="en-US" dirty="0">
                 <a:latin typeface="Times New Roman" panose="02020603050405020304" pitchFamily="18" charset="0"/>
-                <a:ea typeface="Times New Roman" panose="02020603050405020304" pitchFamily="18" charset="0"/>
+                <a:cs typeface="Times New Roman" panose="02020603050405020304" pitchFamily="18" charset="0"/>
               </a:rPr>
               <a:t> </a:t>
             </a:r>
             <a:r>
               <a:rPr lang="en-US" dirty="0" err="1">
                 <a:latin typeface="Times New Roman" panose="02020603050405020304" pitchFamily="18" charset="0"/>
-                <a:ea typeface="Times New Roman" panose="02020603050405020304" pitchFamily="18" charset="0"/>
-              </a:rPr>
-              <a:t>boshladi</a:t>
+                <a:cs typeface="Times New Roman" panose="02020603050405020304" pitchFamily="18" charset="0"/>
+              </a:rPr>
+              <a:t>dunyo</a:t>
             </a:r>
             <a:r>
               <a:rPr lang="en-US" dirty="0">
                 <a:latin typeface="Times New Roman" panose="02020603050405020304" pitchFamily="18" charset="0"/>
-                <a:ea typeface="Times New Roman" panose="02020603050405020304" pitchFamily="18" charset="0"/>
-              </a:rPr>
-              <a:t> — </a:t>
+                <a:cs typeface="Times New Roman" panose="02020603050405020304" pitchFamily="18" charset="0"/>
+              </a:rPr>
+              <a:t>) </a:t>
             </a:r>
             <a:r>
               <a:rPr lang="en-US" dirty="0" err="1">
                 <a:latin typeface="Times New Roman" panose="02020603050405020304" pitchFamily="18" charset="0"/>
-                <a:ea typeface="Times New Roman" panose="02020603050405020304" pitchFamily="18" charset="0"/>
-              </a:rPr>
-              <a:t>havo</a:t>
+                <a:cs typeface="Times New Roman" panose="02020603050405020304" pitchFamily="18" charset="0"/>
+              </a:rPr>
+              <a:t>ruhida</a:t>
             </a:r>
             <a:r>
               <a:rPr lang="en-US" dirty="0">
                 <a:latin typeface="Times New Roman" panose="02020603050405020304" pitchFamily="18" charset="0"/>
-                <a:ea typeface="Times New Roman" panose="02020603050405020304" pitchFamily="18" charset="0"/>
+                <a:cs typeface="Times New Roman" panose="02020603050405020304" pitchFamily="18" charset="0"/>
               </a:rPr>
               <a:t> </a:t>
             </a:r>
             <a:r>
               <a:rPr lang="en-US" dirty="0" err="1">
                 <a:latin typeface="Times New Roman" panose="02020603050405020304" pitchFamily="18" charset="0"/>
-                <a:ea typeface="Times New Roman" panose="02020603050405020304" pitchFamily="18" charset="0"/>
-              </a:rPr>
-              <a:t>hujumlari</a:t>
+                <a:cs typeface="Times New Roman" panose="02020603050405020304" pitchFamily="18" charset="0"/>
+              </a:rPr>
+              <a:t>bo‘lgan</a:t>
             </a:r>
             <a:r>
               <a:rPr lang="en-US" dirty="0">
                 <a:latin typeface="Times New Roman" panose="02020603050405020304" pitchFamily="18" charset="0"/>
-                <a:ea typeface="Times New Roman" panose="02020603050405020304" pitchFamily="18" charset="0"/>
+                <a:cs typeface="Times New Roman" panose="02020603050405020304" pitchFamily="18" charset="0"/>
+              </a:rPr>
+              <a:t> </a:t>
+            </a:r>
+            <a:r>
+              <a:rPr lang="en-US" dirty="0" err="1">
+                <a:latin typeface="Times New Roman" panose="02020603050405020304" pitchFamily="18" charset="0"/>
+                <a:cs typeface="Times New Roman" panose="02020603050405020304" pitchFamily="18" charset="0"/>
+              </a:rPr>
+              <a:t>bo‘linmalarni</a:t>
+            </a:r>
+            <a:r>
+              <a:rPr lang="en-US" dirty="0">
+                <a:latin typeface="Times New Roman" panose="02020603050405020304" pitchFamily="18" charset="0"/>
+                <a:cs typeface="Times New Roman" panose="02020603050405020304" pitchFamily="18" charset="0"/>
+              </a:rPr>
+              <a:t> </a:t>
+            </a:r>
+            <a:r>
+              <a:rPr lang="en-US" dirty="0" err="1">
+                <a:latin typeface="Times New Roman" panose="02020603050405020304" pitchFamily="18" charset="0"/>
+                <a:cs typeface="Times New Roman" panose="02020603050405020304" pitchFamily="18" charset="0"/>
+              </a:rPr>
+              <a:t>tanqid</a:t>
+            </a:r>
+            <a:r>
+              <a:rPr lang="en-US" dirty="0">
+                <a:latin typeface="Times New Roman" panose="02020603050405020304" pitchFamily="18" charset="0"/>
+                <a:cs typeface="Times New Roman" panose="02020603050405020304" pitchFamily="18" charset="0"/>
+              </a:rPr>
+              <a:t> </a:t>
+            </a:r>
+            <a:r>
+              <a:rPr lang="en-US" dirty="0" err="1">
+                <a:latin typeface="Times New Roman" panose="02020603050405020304" pitchFamily="18" charset="0"/>
+                <a:cs typeface="Times New Roman" panose="02020603050405020304" pitchFamily="18" charset="0"/>
+              </a:rPr>
+              <a:t>qildi</a:t>
+            </a:r>
+            <a:r>
+              <a:rPr lang="en-US" dirty="0">
+                <a:latin typeface="Times New Roman" panose="02020603050405020304" pitchFamily="18" charset="0"/>
+                <a:cs typeface="Times New Roman" panose="02020603050405020304" pitchFamily="18" charset="0"/>
+              </a:rPr>
+              <a:t>. </a:t>
+            </a:r>
+            <a:r>
+              <a:rPr lang="en-US" dirty="0">
+                <a:latin typeface="Times New Roman" panose="02020603050405020304" pitchFamily="18" charset="0"/>
+                <a:cs typeface="Times New Roman" panose="02020603050405020304" pitchFamily="18" charset="0"/>
+                <a:hlinkClick r:id="rId4"/>
+              </a:rPr>
+              <a:t>Reuters</a:t>
+            </a:r>
+            <a:endParaRPr lang="en-US" dirty="0">
+              <a:latin typeface="Times New Roman" panose="02020603050405020304" pitchFamily="18" charset="0"/>
+              <a:cs typeface="Times New Roman" panose="02020603050405020304" pitchFamily="18" charset="0"/>
+            </a:endParaRPr>
+          </a:p>
+          <a:p>
+            <a:pPr>
+              <a:buFont typeface="Arial" panose="020B0604020202020204" pitchFamily="34" charset="0"/>
+              <a:buChar char="•"/>
+            </a:pPr>
+            <a:r>
+              <a:rPr lang="en-US" dirty="0">
+                <a:latin typeface="Times New Roman" panose="02020603050405020304" pitchFamily="18" charset="0"/>
+                <a:cs typeface="Times New Roman" panose="02020603050405020304" pitchFamily="18" charset="0"/>
+              </a:rPr>
+              <a:t>U, </a:t>
+            </a:r>
+            <a:r>
+              <a:rPr lang="en-US" dirty="0" err="1">
+                <a:latin typeface="Times New Roman" panose="02020603050405020304" pitchFamily="18" charset="0"/>
+                <a:cs typeface="Times New Roman" panose="02020603050405020304" pitchFamily="18" charset="0"/>
+              </a:rPr>
+              <a:t>shuningdek</a:t>
+            </a:r>
+            <a:r>
+              <a:rPr lang="en-US" dirty="0">
+                <a:latin typeface="Times New Roman" panose="02020603050405020304" pitchFamily="18" charset="0"/>
+                <a:cs typeface="Times New Roman" panose="02020603050405020304" pitchFamily="18" charset="0"/>
               </a:rPr>
               <a:t>, </a:t>
             </a:r>
             <a:r>
               <a:rPr lang="en-US" dirty="0" err="1">
                 <a:latin typeface="Times New Roman" panose="02020603050405020304" pitchFamily="18" charset="0"/>
-                <a:ea typeface="Times New Roman" panose="02020603050405020304" pitchFamily="18" charset="0"/>
-              </a:rPr>
-              <a:t>sabotaj</a:t>
+                <a:cs typeface="Times New Roman" panose="02020603050405020304" pitchFamily="18" charset="0"/>
+              </a:rPr>
+              <a:t>Tayvanning</a:t>
             </a:r>
             <a:r>
               <a:rPr lang="en-US" dirty="0">
                 <a:latin typeface="Times New Roman" panose="02020603050405020304" pitchFamily="18" charset="0"/>
-                <a:ea typeface="Times New Roman" panose="02020603050405020304" pitchFamily="18" charset="0"/>
+                <a:cs typeface="Times New Roman" panose="02020603050405020304" pitchFamily="18" charset="0"/>
               </a:rPr>
               <a:t> </a:t>
             </a:r>
             <a:r>
               <a:rPr lang="en-US" dirty="0" err="1">
                 <a:latin typeface="Times New Roman" panose="02020603050405020304" pitchFamily="18" charset="0"/>
-                <a:ea typeface="Times New Roman" panose="02020603050405020304" pitchFamily="18" charset="0"/>
-              </a:rPr>
-              <a:t>holatlarini</a:t>
+                <a:cs typeface="Times New Roman" panose="02020603050405020304" pitchFamily="18" charset="0"/>
+              </a:rPr>
+              <a:t>masalasida</a:t>
             </a:r>
             <a:r>
               <a:rPr lang="en-US" dirty="0">
                 <a:latin typeface="Times New Roman" panose="02020603050405020304" pitchFamily="18" charset="0"/>
-                <a:ea typeface="Times New Roman" panose="02020603050405020304" pitchFamily="18" charset="0"/>
+                <a:cs typeface="Times New Roman" panose="02020603050405020304" pitchFamily="18" charset="0"/>
               </a:rPr>
               <a:t> </a:t>
             </a:r>
             <a:r>
               <a:rPr lang="en-US" dirty="0" err="1">
                 <a:latin typeface="Times New Roman" panose="02020603050405020304" pitchFamily="18" charset="0"/>
-                <a:ea typeface="Times New Roman" panose="02020603050405020304" pitchFamily="18" charset="0"/>
-              </a:rPr>
-              <a:t>simulyatsiya</a:t>
+                <a:cs typeface="Times New Roman" panose="02020603050405020304" pitchFamily="18" charset="0"/>
+              </a:rPr>
+              <a:t>ogohlantirish</a:t>
             </a:r>
             <a:r>
               <a:rPr lang="en-US" dirty="0">
                 <a:latin typeface="Times New Roman" panose="02020603050405020304" pitchFamily="18" charset="0"/>
-                <a:ea typeface="Times New Roman" panose="02020603050405020304" pitchFamily="18" charset="0"/>
+                <a:cs typeface="Times New Roman" panose="02020603050405020304" pitchFamily="18" charset="0"/>
               </a:rPr>
               <a:t> </a:t>
             </a:r>
             <a:r>
               <a:rPr lang="en-US" dirty="0" err="1">
                 <a:latin typeface="Times New Roman" panose="02020603050405020304" pitchFamily="18" charset="0"/>
-                <a:ea typeface="Times New Roman" panose="02020603050405020304" pitchFamily="18" charset="0"/>
-              </a:rPr>
-              <a:t>qilish</a:t>
+                <a:cs typeface="Times New Roman" panose="02020603050405020304" pitchFamily="18" charset="0"/>
+              </a:rPr>
+              <a:t>berib</a:t>
             </a:r>
             <a:r>
               <a:rPr lang="en-US" dirty="0">
                 <a:latin typeface="Times New Roman" panose="02020603050405020304" pitchFamily="18" charset="0"/>
-                <a:ea typeface="Times New Roman" panose="02020603050405020304" pitchFamily="18" charset="0"/>
-              </a:rPr>
-              <a:t>, </a:t>
+                <a:cs typeface="Times New Roman" panose="02020603050405020304" pitchFamily="18" charset="0"/>
+              </a:rPr>
+              <a:t>, har </a:t>
             </a:r>
             <a:r>
               <a:rPr lang="en-US" dirty="0" err="1">
                 <a:latin typeface="Times New Roman" panose="02020603050405020304" pitchFamily="18" charset="0"/>
-                <a:ea typeface="Times New Roman" panose="02020603050405020304" pitchFamily="18" charset="0"/>
-              </a:rPr>
-              <a:t>shuningdek</a:t>
+                <a:cs typeface="Times New Roman" panose="02020603050405020304" pitchFamily="18" charset="0"/>
+              </a:rPr>
+              <a:t>qanday</a:t>
             </a:r>
             <a:r>
               <a:rPr lang="en-US" dirty="0">
                 <a:latin typeface="Times New Roman" panose="02020603050405020304" pitchFamily="18" charset="0"/>
-                <a:ea typeface="Times New Roman" panose="02020603050405020304" pitchFamily="18" charset="0"/>
-              </a:rPr>
-              <a:t>, </a:t>
+                <a:cs typeface="Times New Roman" panose="02020603050405020304" pitchFamily="18" charset="0"/>
+              </a:rPr>
+              <a:t> </a:t>
             </a:r>
             <a:r>
               <a:rPr lang="en-US" dirty="0" err="1">
                 <a:latin typeface="Times New Roman" panose="02020603050405020304" pitchFamily="18" charset="0"/>
-                <a:ea typeface="Times New Roman" panose="02020603050405020304" pitchFamily="18" charset="0"/>
-              </a:rPr>
-              <a:t>Belarusiya</a:t>
+                <a:cs typeface="Times New Roman" panose="02020603050405020304" pitchFamily="18" charset="0"/>
+              </a:rPr>
+              <a:t>tashqi</a:t>
             </a:r>
             <a:r>
               <a:rPr lang="en-US" dirty="0">
                 <a:latin typeface="Times New Roman" panose="02020603050405020304" pitchFamily="18" charset="0"/>
-                <a:ea typeface="Times New Roman" panose="02020603050405020304" pitchFamily="18" charset="0"/>
+                <a:cs typeface="Times New Roman" panose="02020603050405020304" pitchFamily="18" charset="0"/>
               </a:rPr>
               <a:t> </a:t>
             </a:r>
             <a:r>
               <a:rPr lang="en-US" dirty="0" err="1">
                 <a:latin typeface="Times New Roman" panose="02020603050405020304" pitchFamily="18" charset="0"/>
-                <a:ea typeface="Times New Roman" panose="02020603050405020304" pitchFamily="18" charset="0"/>
-              </a:rPr>
-              <a:t>hududida</a:t>
+                <a:cs typeface="Times New Roman" panose="02020603050405020304" pitchFamily="18" charset="0"/>
+              </a:rPr>
+              <a:t>aralashuvga</a:t>
             </a:r>
             <a:r>
               <a:rPr lang="en-US" dirty="0">
                 <a:latin typeface="Times New Roman" panose="02020603050405020304" pitchFamily="18" charset="0"/>
-                <a:ea typeface="Times New Roman" panose="02020603050405020304" pitchFamily="18" charset="0"/>
+                <a:cs typeface="Times New Roman" panose="02020603050405020304" pitchFamily="18" charset="0"/>
               </a:rPr>
               <a:t> </a:t>
             </a:r>
             <a:r>
               <a:rPr lang="en-US" dirty="0" err="1">
                 <a:latin typeface="Times New Roman" panose="02020603050405020304" pitchFamily="18" charset="0"/>
-                <a:ea typeface="Times New Roman" panose="02020603050405020304" pitchFamily="18" charset="0"/>
-              </a:rPr>
-              <a:t>taktika</a:t>
+                <a:cs typeface="Times New Roman" panose="02020603050405020304" pitchFamily="18" charset="0"/>
+              </a:rPr>
+              <a:t>qarshi</a:t>
             </a:r>
             <a:r>
               <a:rPr lang="en-US" dirty="0">
                 <a:latin typeface="Times New Roman" panose="02020603050405020304" pitchFamily="18" charset="0"/>
-                <a:ea typeface="Times New Roman" panose="02020603050405020304" pitchFamily="18" charset="0"/>
+                <a:cs typeface="Times New Roman" panose="02020603050405020304" pitchFamily="18" charset="0"/>
               </a:rPr>
               <a:t> </a:t>
             </a:r>
             <a:r>
               <a:rPr lang="en-US" dirty="0" err="1">
                 <a:latin typeface="Times New Roman" panose="02020603050405020304" pitchFamily="18" charset="0"/>
-                <a:ea typeface="Times New Roman" panose="02020603050405020304" pitchFamily="18" charset="0"/>
-              </a:rPr>
-              <a:t>yadroviy</a:t>
+                <a:cs typeface="Times New Roman" panose="02020603050405020304" pitchFamily="18" charset="0"/>
+              </a:rPr>
+              <a:t>kurashishini</a:t>
             </a:r>
             <a:r>
               <a:rPr lang="en-US" dirty="0">
                 <a:latin typeface="Times New Roman" panose="02020603050405020304" pitchFamily="18" charset="0"/>
-                <a:ea typeface="Times New Roman" panose="02020603050405020304" pitchFamily="18" charset="0"/>
+                <a:cs typeface="Times New Roman" panose="02020603050405020304" pitchFamily="18" charset="0"/>
               </a:rPr>
               <a:t> </a:t>
             </a:r>
             <a:r>
               <a:rPr lang="en-US" dirty="0" err="1">
                 <a:latin typeface="Times New Roman" panose="02020603050405020304" pitchFamily="18" charset="0"/>
-                <a:ea typeface="Times New Roman" panose="02020603050405020304" pitchFamily="18" charset="0"/>
-              </a:rPr>
-              <a:t>qurollar</a:t>
+                <a:cs typeface="Times New Roman" panose="02020603050405020304" pitchFamily="18" charset="0"/>
+              </a:rPr>
+              <a:t>aytdi</a:t>
             </a:r>
             <a:r>
               <a:rPr lang="en-US" dirty="0">
                 <a:latin typeface="Times New Roman" panose="02020603050405020304" pitchFamily="18" charset="0"/>
-                <a:ea typeface="Times New Roman" panose="02020603050405020304" pitchFamily="18" charset="0"/>
-              </a:rPr>
-              <a:t> </a:t>
-            </a:r>
-            <a:r>
-              <a:rPr lang="en-US" dirty="0" err="1">
-                <a:latin typeface="Times New Roman" panose="02020603050405020304" pitchFamily="18" charset="0"/>
-                <a:ea typeface="Times New Roman" panose="02020603050405020304" pitchFamily="18" charset="0"/>
-              </a:rPr>
-              <a:t>mavjudligi</a:t>
+                <a:cs typeface="Times New Roman" panose="02020603050405020304" pitchFamily="18" charset="0"/>
+              </a:rPr>
+              <a:t>. </a:t>
             </a:r>
             <a:r>
               <a:rPr lang="en-US" dirty="0">
                 <a:latin typeface="Times New Roman" panose="02020603050405020304" pitchFamily="18" charset="0"/>
-                <a:ea typeface="Times New Roman" panose="02020603050405020304" pitchFamily="18" charset="0"/>
-              </a:rPr>
-              <a:t> </a:t>
-            </a:r>
-            <a:r>
-              <a:rPr lang="en-US" dirty="0" err="1">
-                <a:latin typeface="Times New Roman" panose="02020603050405020304" pitchFamily="18" charset="0"/>
-                <a:ea typeface="Times New Roman" panose="02020603050405020304" pitchFamily="18" charset="0"/>
-              </a:rPr>
-              <a:t>haqidagi</a:t>
-            </a:r>
-            <a:r>
-              <a:rPr lang="en-US" dirty="0">
-                <a:latin typeface="Times New Roman" panose="02020603050405020304" pitchFamily="18" charset="0"/>
-                <a:ea typeface="Times New Roman" panose="02020603050405020304" pitchFamily="18" charset="0"/>
-              </a:rPr>
-              <a:t> </a:t>
-            </a:r>
-            <a:r>
-              <a:rPr lang="en-US" dirty="0" err="1">
-                <a:latin typeface="Times New Roman" panose="02020603050405020304" pitchFamily="18" charset="0"/>
-                <a:ea typeface="Times New Roman" panose="02020603050405020304" pitchFamily="18" charset="0"/>
-              </a:rPr>
-              <a:t>xavotirlar</a:t>
-            </a:r>
-            <a:r>
-              <a:rPr lang="en-US" dirty="0">
-                <a:latin typeface="Times New Roman" panose="02020603050405020304" pitchFamily="18" charset="0"/>
-                <a:ea typeface="Times New Roman" panose="02020603050405020304" pitchFamily="18" charset="0"/>
-              </a:rPr>
-              <a:t> </a:t>
-            </a:r>
-            <a:r>
-              <a:rPr lang="en-US" dirty="0" err="1">
-                <a:latin typeface="Times New Roman" panose="02020603050405020304" pitchFamily="18" charset="0"/>
-                <a:ea typeface="Times New Roman" panose="02020603050405020304" pitchFamily="18" charset="0"/>
-              </a:rPr>
-              <a:t>paydo</a:t>
-            </a:r>
-            <a:r>
-              <a:rPr lang="en-US" dirty="0">
-                <a:latin typeface="Times New Roman" panose="02020603050405020304" pitchFamily="18" charset="0"/>
-                <a:ea typeface="Times New Roman" panose="02020603050405020304" pitchFamily="18" charset="0"/>
-              </a:rPr>
-              <a:t> </a:t>
-            </a:r>
-            <a:r>
-              <a:rPr lang="en-US" dirty="0" err="1">
-                <a:latin typeface="Times New Roman" panose="02020603050405020304" pitchFamily="18" charset="0"/>
-                <a:ea typeface="Times New Roman" panose="02020603050405020304" pitchFamily="18" charset="0"/>
-              </a:rPr>
-              <a:t>bo‘ldi</a:t>
-            </a:r>
-            <a:r>
-              <a:rPr lang="en-US" dirty="0">
-                <a:latin typeface="Times New Roman" panose="02020603050405020304" pitchFamily="18" charset="0"/>
-                <a:ea typeface="Times New Roman" panose="02020603050405020304" pitchFamily="18" charset="0"/>
-              </a:rPr>
-              <a:t>. </a:t>
-            </a:r>
-          </a:p>
-          <a:p>
-            <a:pPr marL="342900" lvl="0" indent="-342900" algn="just">
-              <a:lnSpc>
-                <a:spcPct val="150000"/>
-              </a:lnSpc>
-              <a:spcBef>
-                <a:spcPts val="600"/>
-              </a:spcBef>
-              <a:buSzPts val="1000"/>
-              <a:buFont typeface="Symbol" panose="05050102010706020507" pitchFamily="18" charset="2"/>
-              <a:buChar char=""/>
-              <a:tabLst>
-                <a:tab pos="457200" algn="l"/>
-              </a:tabLst>
-            </a:pPr>
-            <a:r>
-              <a:rPr lang="en-US" dirty="0" err="1">
-                <a:latin typeface="Times New Roman" panose="02020603050405020304" pitchFamily="18" charset="0"/>
-                <a:ea typeface="Times New Roman" panose="02020603050405020304" pitchFamily="18" charset="0"/>
-              </a:rPr>
-              <a:t>Isroil</a:t>
-            </a:r>
-            <a:r>
-              <a:rPr lang="en-US" dirty="0">
-                <a:latin typeface="Times New Roman" panose="02020603050405020304" pitchFamily="18" charset="0"/>
-                <a:ea typeface="Times New Roman" panose="02020603050405020304" pitchFamily="18" charset="0"/>
-              </a:rPr>
-              <a:t> </a:t>
-            </a:r>
-            <a:r>
-              <a:rPr lang="en-US" dirty="0" err="1">
-                <a:latin typeface="Times New Roman" panose="02020603050405020304" pitchFamily="18" charset="0"/>
-                <a:ea typeface="Times New Roman" panose="02020603050405020304" pitchFamily="18" charset="0"/>
-              </a:rPr>
-              <a:t>Qatarda</a:t>
-            </a:r>
-            <a:r>
-              <a:rPr lang="en-US" dirty="0">
-                <a:latin typeface="Times New Roman" panose="02020603050405020304" pitchFamily="18" charset="0"/>
-                <a:ea typeface="Times New Roman" panose="02020603050405020304" pitchFamily="18" charset="0"/>
-              </a:rPr>
-              <a:t> </a:t>
-            </a:r>
-            <a:r>
-              <a:rPr lang="en-US" dirty="0" err="1">
-                <a:latin typeface="Times New Roman" panose="02020603050405020304" pitchFamily="18" charset="0"/>
-                <a:ea typeface="Times New Roman" panose="02020603050405020304" pitchFamily="18" charset="0"/>
-              </a:rPr>
-              <a:t>joylashgan</a:t>
-            </a:r>
-            <a:r>
-              <a:rPr lang="en-US" dirty="0">
-                <a:latin typeface="Times New Roman" panose="02020603050405020304" pitchFamily="18" charset="0"/>
-                <a:ea typeface="Times New Roman" panose="02020603050405020304" pitchFamily="18" charset="0"/>
-              </a:rPr>
-              <a:t> Hamas </a:t>
-            </a:r>
-            <a:r>
-              <a:rPr lang="en-US" dirty="0" err="1">
-                <a:latin typeface="Times New Roman" panose="02020603050405020304" pitchFamily="18" charset="0"/>
-                <a:ea typeface="Times New Roman" panose="02020603050405020304" pitchFamily="18" charset="0"/>
-              </a:rPr>
-              <a:t>yetakchilariga</a:t>
-            </a:r>
-            <a:r>
-              <a:rPr lang="en-US" dirty="0">
-                <a:latin typeface="Times New Roman" panose="02020603050405020304" pitchFamily="18" charset="0"/>
-                <a:ea typeface="Times New Roman" panose="02020603050405020304" pitchFamily="18" charset="0"/>
-              </a:rPr>
-              <a:t> </a:t>
-            </a:r>
-            <a:r>
-              <a:rPr lang="en-US" dirty="0" err="1">
-                <a:latin typeface="Times New Roman" panose="02020603050405020304" pitchFamily="18" charset="0"/>
-                <a:ea typeface="Times New Roman" panose="02020603050405020304" pitchFamily="18" charset="0"/>
-              </a:rPr>
-              <a:t>havodan</a:t>
-            </a:r>
-            <a:r>
-              <a:rPr lang="en-US" dirty="0">
-                <a:latin typeface="Times New Roman" panose="02020603050405020304" pitchFamily="18" charset="0"/>
-                <a:ea typeface="Times New Roman" panose="02020603050405020304" pitchFamily="18" charset="0"/>
-              </a:rPr>
-              <a:t> </a:t>
-            </a:r>
-            <a:r>
-              <a:rPr lang="en-US" dirty="0" err="1">
-                <a:latin typeface="Times New Roman" panose="02020603050405020304" pitchFamily="18" charset="0"/>
-                <a:ea typeface="Times New Roman" panose="02020603050405020304" pitchFamily="18" charset="0"/>
-              </a:rPr>
-              <a:t>hujum</a:t>
-            </a:r>
-            <a:r>
-              <a:rPr lang="en-US" dirty="0">
-                <a:latin typeface="Times New Roman" panose="02020603050405020304" pitchFamily="18" charset="0"/>
-                <a:ea typeface="Times New Roman" panose="02020603050405020304" pitchFamily="18" charset="0"/>
-              </a:rPr>
-              <a:t> </a:t>
-            </a:r>
-            <a:r>
-              <a:rPr lang="en-US" dirty="0" err="1">
-                <a:latin typeface="Times New Roman" panose="02020603050405020304" pitchFamily="18" charset="0"/>
-                <a:ea typeface="Times New Roman" panose="02020603050405020304" pitchFamily="18" charset="0"/>
-              </a:rPr>
-              <a:t>uyushtirdi</a:t>
-            </a:r>
-            <a:r>
-              <a:rPr lang="en-US" dirty="0">
-                <a:latin typeface="Times New Roman" panose="02020603050405020304" pitchFamily="18" charset="0"/>
-                <a:ea typeface="Times New Roman" panose="02020603050405020304" pitchFamily="18" charset="0"/>
-              </a:rPr>
-              <a:t>; </a:t>
-            </a:r>
-            <a:r>
-              <a:rPr lang="en-US" dirty="0" err="1">
-                <a:latin typeface="Times New Roman" panose="02020603050405020304" pitchFamily="18" charset="0"/>
-                <a:ea typeface="Times New Roman" panose="02020603050405020304" pitchFamily="18" charset="0"/>
-              </a:rPr>
-              <a:t>bu</a:t>
-            </a:r>
-            <a:r>
-              <a:rPr lang="en-US" dirty="0">
-                <a:latin typeface="Times New Roman" panose="02020603050405020304" pitchFamily="18" charset="0"/>
-                <a:ea typeface="Times New Roman" panose="02020603050405020304" pitchFamily="18" charset="0"/>
-              </a:rPr>
-              <a:t> </a:t>
-            </a:r>
-            <a:r>
-              <a:rPr lang="en-US" dirty="0" err="1">
-                <a:latin typeface="Times New Roman" panose="02020603050405020304" pitchFamily="18" charset="0"/>
-                <a:ea typeface="Times New Roman" panose="02020603050405020304" pitchFamily="18" charset="0"/>
-              </a:rPr>
-              <a:t>xalqaro</a:t>
-            </a:r>
-            <a:r>
-              <a:rPr lang="en-US" dirty="0">
-                <a:latin typeface="Times New Roman" panose="02020603050405020304" pitchFamily="18" charset="0"/>
-                <a:ea typeface="Times New Roman" panose="02020603050405020304" pitchFamily="18" charset="0"/>
-              </a:rPr>
-              <a:t> </a:t>
-            </a:r>
-            <a:r>
-              <a:rPr lang="en-US" dirty="0" err="1">
-                <a:latin typeface="Times New Roman" panose="02020603050405020304" pitchFamily="18" charset="0"/>
-                <a:ea typeface="Times New Roman" panose="02020603050405020304" pitchFamily="18" charset="0"/>
-              </a:rPr>
-              <a:t>keskinliklarni</a:t>
-            </a:r>
-            <a:r>
-              <a:rPr lang="en-US" dirty="0">
-                <a:latin typeface="Times New Roman" panose="02020603050405020304" pitchFamily="18" charset="0"/>
-                <a:ea typeface="Times New Roman" panose="02020603050405020304" pitchFamily="18" charset="0"/>
-              </a:rPr>
-              <a:t> </a:t>
-            </a:r>
-            <a:r>
-              <a:rPr lang="en-US" dirty="0" err="1">
-                <a:latin typeface="Times New Roman" panose="02020603050405020304" pitchFamily="18" charset="0"/>
-                <a:ea typeface="Times New Roman" panose="02020603050405020304" pitchFamily="18" charset="0"/>
-              </a:rPr>
-              <a:t>kuchaytirdi</a:t>
-            </a:r>
-            <a:r>
-              <a:rPr lang="en-US" dirty="0">
-                <a:latin typeface="Times New Roman" panose="02020603050405020304" pitchFamily="18" charset="0"/>
-                <a:ea typeface="Times New Roman" panose="02020603050405020304" pitchFamily="18" charset="0"/>
-              </a:rPr>
-              <a:t>. </a:t>
-            </a:r>
-          </a:p>
-          <a:p>
-            <a:pPr marL="342900" lvl="0" indent="-342900" algn="just">
-              <a:lnSpc>
-                <a:spcPct val="150000"/>
-              </a:lnSpc>
-              <a:spcBef>
-                <a:spcPts val="600"/>
-              </a:spcBef>
-              <a:buSzPts val="1000"/>
-              <a:buFont typeface="Symbol" panose="05050102010706020507" pitchFamily="18" charset="2"/>
-              <a:buChar char=""/>
-              <a:tabLst>
-                <a:tab pos="457200" algn="l"/>
-              </a:tabLst>
-            </a:pPr>
-            <a:r>
-              <a:rPr lang="en-US" dirty="0" err="1">
-                <a:latin typeface="Times New Roman" panose="02020603050405020304" pitchFamily="18" charset="0"/>
-                <a:ea typeface="Times New Roman" panose="02020603050405020304" pitchFamily="18" charset="0"/>
-              </a:rPr>
-              <a:t>Xitoyning</a:t>
-            </a:r>
-            <a:r>
-              <a:rPr lang="en-US" dirty="0">
-                <a:latin typeface="Times New Roman" panose="02020603050405020304" pitchFamily="18" charset="0"/>
-                <a:ea typeface="Times New Roman" panose="02020603050405020304" pitchFamily="18" charset="0"/>
-              </a:rPr>
-              <a:t> </a:t>
-            </a:r>
-            <a:r>
-              <a:rPr lang="en-US" dirty="0" err="1">
-                <a:latin typeface="Times New Roman" panose="02020603050405020304" pitchFamily="18" charset="0"/>
-                <a:ea typeface="Times New Roman" panose="02020603050405020304" pitchFamily="18" charset="0"/>
-              </a:rPr>
-              <a:t>harbiy</a:t>
-            </a:r>
-            <a:r>
-              <a:rPr lang="en-US" dirty="0">
-                <a:latin typeface="Times New Roman" panose="02020603050405020304" pitchFamily="18" charset="0"/>
-                <a:ea typeface="Times New Roman" panose="02020603050405020304" pitchFamily="18" charset="0"/>
-              </a:rPr>
-              <a:t> </a:t>
-            </a:r>
-            <a:r>
-              <a:rPr lang="en-US" dirty="0" err="1">
-                <a:latin typeface="Times New Roman" panose="02020603050405020304" pitchFamily="18" charset="0"/>
-                <a:ea typeface="Times New Roman" panose="02020603050405020304" pitchFamily="18" charset="0"/>
-              </a:rPr>
-              <a:t>paradi</a:t>
-            </a:r>
-            <a:r>
-              <a:rPr lang="en-US" dirty="0">
-                <a:latin typeface="Times New Roman" panose="02020603050405020304" pitchFamily="18" charset="0"/>
-                <a:ea typeface="Times New Roman" panose="02020603050405020304" pitchFamily="18" charset="0"/>
-              </a:rPr>
-              <a:t> (“Victory Day” </a:t>
-            </a:r>
-            <a:r>
-              <a:rPr lang="en-US" dirty="0" err="1">
-                <a:latin typeface="Times New Roman" panose="02020603050405020304" pitchFamily="18" charset="0"/>
-                <a:ea typeface="Times New Roman" panose="02020603050405020304" pitchFamily="18" charset="0"/>
-              </a:rPr>
-              <a:t>haftasi</a:t>
-            </a:r>
-            <a:r>
-              <a:rPr lang="en-US" dirty="0">
-                <a:latin typeface="Times New Roman" panose="02020603050405020304" pitchFamily="18" charset="0"/>
-                <a:ea typeface="Times New Roman" panose="02020603050405020304" pitchFamily="18" charset="0"/>
-              </a:rPr>
-              <a:t>) </a:t>
-            </a:r>
-            <a:r>
-              <a:rPr lang="en-US" dirty="0" err="1">
-                <a:latin typeface="Times New Roman" panose="02020603050405020304" pitchFamily="18" charset="0"/>
-                <a:ea typeface="Times New Roman" panose="02020603050405020304" pitchFamily="18" charset="0"/>
-              </a:rPr>
-              <a:t>doirasida</a:t>
-            </a:r>
-            <a:r>
-              <a:rPr lang="en-US" dirty="0">
-                <a:latin typeface="Times New Roman" panose="02020603050405020304" pitchFamily="18" charset="0"/>
-                <a:ea typeface="Times New Roman" panose="02020603050405020304" pitchFamily="18" charset="0"/>
-              </a:rPr>
-              <a:t> Rossiya </a:t>
-            </a:r>
-            <a:r>
-              <a:rPr lang="en-US" dirty="0" err="1">
-                <a:latin typeface="Times New Roman" panose="02020603050405020304" pitchFamily="18" charset="0"/>
-                <a:ea typeface="Times New Roman" panose="02020603050405020304" pitchFamily="18" charset="0"/>
-              </a:rPr>
-              <a:t>va</a:t>
-            </a:r>
-            <a:r>
-              <a:rPr lang="en-US" dirty="0">
-                <a:latin typeface="Times New Roman" panose="02020603050405020304" pitchFamily="18" charset="0"/>
-                <a:ea typeface="Times New Roman" panose="02020603050405020304" pitchFamily="18" charset="0"/>
-              </a:rPr>
-              <a:t> </a:t>
-            </a:r>
-            <a:r>
-              <a:rPr lang="en-US" dirty="0" err="1">
-                <a:latin typeface="Times New Roman" panose="02020603050405020304" pitchFamily="18" charset="0"/>
-                <a:ea typeface="Times New Roman" panose="02020603050405020304" pitchFamily="18" charset="0"/>
-              </a:rPr>
-              <a:t>Shimoliy</a:t>
-            </a:r>
-            <a:r>
-              <a:rPr lang="en-US" dirty="0">
-                <a:latin typeface="Times New Roman" panose="02020603050405020304" pitchFamily="18" charset="0"/>
-                <a:ea typeface="Times New Roman" panose="02020603050405020304" pitchFamily="18" charset="0"/>
-              </a:rPr>
-              <a:t> </a:t>
-            </a:r>
-            <a:r>
-              <a:rPr lang="en-US" dirty="0" err="1">
-                <a:latin typeface="Times New Roman" panose="02020603050405020304" pitchFamily="18" charset="0"/>
-                <a:ea typeface="Times New Roman" panose="02020603050405020304" pitchFamily="18" charset="0"/>
-              </a:rPr>
-              <a:t>Koreya</a:t>
-            </a:r>
-            <a:r>
-              <a:rPr lang="en-US" dirty="0">
-                <a:latin typeface="Times New Roman" panose="02020603050405020304" pitchFamily="18" charset="0"/>
-                <a:ea typeface="Times New Roman" panose="02020603050405020304" pitchFamily="18" charset="0"/>
-              </a:rPr>
-              <a:t> </a:t>
-            </a:r>
-            <a:r>
-              <a:rPr lang="en-US" dirty="0" err="1">
-                <a:latin typeface="Times New Roman" panose="02020603050405020304" pitchFamily="18" charset="0"/>
-                <a:ea typeface="Times New Roman" panose="02020603050405020304" pitchFamily="18" charset="0"/>
-              </a:rPr>
-              <a:t>liderlari</a:t>
-            </a:r>
-            <a:r>
-              <a:rPr lang="en-US" dirty="0">
-                <a:latin typeface="Times New Roman" panose="02020603050405020304" pitchFamily="18" charset="0"/>
-                <a:ea typeface="Times New Roman" panose="02020603050405020304" pitchFamily="18" charset="0"/>
-              </a:rPr>
-              <a:t> </a:t>
-            </a:r>
-            <a:r>
-              <a:rPr lang="en-US" dirty="0" err="1">
-                <a:latin typeface="Times New Roman" panose="02020603050405020304" pitchFamily="18" charset="0"/>
-                <a:ea typeface="Times New Roman" panose="02020603050405020304" pitchFamily="18" charset="0"/>
-              </a:rPr>
-              <a:t>ishtirok</a:t>
-            </a:r>
-            <a:r>
-              <a:rPr lang="en-US" dirty="0">
-                <a:latin typeface="Times New Roman" panose="02020603050405020304" pitchFamily="18" charset="0"/>
-                <a:ea typeface="Times New Roman" panose="02020603050405020304" pitchFamily="18" charset="0"/>
-              </a:rPr>
-              <a:t> </a:t>
-            </a:r>
-            <a:r>
-              <a:rPr lang="en-US" dirty="0" err="1">
-                <a:latin typeface="Times New Roman" panose="02020603050405020304" pitchFamily="18" charset="0"/>
-                <a:ea typeface="Times New Roman" panose="02020603050405020304" pitchFamily="18" charset="0"/>
-              </a:rPr>
-              <a:t>etdi</a:t>
-            </a:r>
-            <a:r>
-              <a:rPr lang="en-US" dirty="0">
-                <a:latin typeface="Times New Roman" panose="02020603050405020304" pitchFamily="18" charset="0"/>
-                <a:ea typeface="Times New Roman" panose="02020603050405020304" pitchFamily="18" charset="0"/>
-              </a:rPr>
-              <a:t>; </a:t>
-            </a:r>
-            <a:r>
-              <a:rPr lang="en-US" dirty="0" err="1">
-                <a:latin typeface="Times New Roman" panose="02020603050405020304" pitchFamily="18" charset="0"/>
-                <a:ea typeface="Times New Roman" panose="02020603050405020304" pitchFamily="18" charset="0"/>
-              </a:rPr>
-              <a:t>G‘arbiylar</a:t>
-            </a:r>
-            <a:r>
-              <a:rPr lang="en-US" dirty="0">
-                <a:latin typeface="Times New Roman" panose="02020603050405020304" pitchFamily="18" charset="0"/>
-                <a:ea typeface="Times New Roman" panose="02020603050405020304" pitchFamily="18" charset="0"/>
-              </a:rPr>
-              <a:t> </a:t>
-            </a:r>
-            <a:r>
-              <a:rPr lang="en-US" dirty="0" err="1">
-                <a:latin typeface="Times New Roman" panose="02020603050405020304" pitchFamily="18" charset="0"/>
-                <a:ea typeface="Times New Roman" panose="02020603050405020304" pitchFamily="18" charset="0"/>
-              </a:rPr>
-              <a:t>yo‘qligi</a:t>
-            </a:r>
-            <a:r>
-              <a:rPr lang="en-US" dirty="0">
-                <a:latin typeface="Times New Roman" panose="02020603050405020304" pitchFamily="18" charset="0"/>
-                <a:ea typeface="Times New Roman" panose="02020603050405020304" pitchFamily="18" charset="0"/>
-              </a:rPr>
-              <a:t> </a:t>
-            </a:r>
-            <a:r>
-              <a:rPr lang="en-US" dirty="0" err="1">
-                <a:latin typeface="Times New Roman" panose="02020603050405020304" pitchFamily="18" charset="0"/>
-                <a:ea typeface="Times New Roman" panose="02020603050405020304" pitchFamily="18" charset="0"/>
-              </a:rPr>
-              <a:t>va</a:t>
-            </a:r>
-            <a:r>
-              <a:rPr lang="en-US" dirty="0">
-                <a:latin typeface="Times New Roman" panose="02020603050405020304" pitchFamily="18" charset="0"/>
-                <a:ea typeface="Times New Roman" panose="02020603050405020304" pitchFamily="18" charset="0"/>
-              </a:rPr>
-              <a:t> </a:t>
-            </a:r>
-            <a:r>
-              <a:rPr lang="en-US" dirty="0" err="1">
-                <a:latin typeface="Times New Roman" panose="02020603050405020304" pitchFamily="18" charset="0"/>
-                <a:ea typeface="Times New Roman" panose="02020603050405020304" pitchFamily="18" charset="0"/>
-              </a:rPr>
-              <a:t>g‘arb</a:t>
-            </a:r>
-            <a:r>
-              <a:rPr lang="en-US" dirty="0">
-                <a:latin typeface="Times New Roman" panose="02020603050405020304" pitchFamily="18" charset="0"/>
-                <a:ea typeface="Times New Roman" panose="02020603050405020304" pitchFamily="18" charset="0"/>
-              </a:rPr>
-              <a:t> global </a:t>
-            </a:r>
-            <a:r>
-              <a:rPr lang="en-US" dirty="0" err="1">
-                <a:latin typeface="Times New Roman" panose="02020603050405020304" pitchFamily="18" charset="0"/>
-                <a:ea typeface="Times New Roman" panose="02020603050405020304" pitchFamily="18" charset="0"/>
-              </a:rPr>
-              <a:t>tartibiga</a:t>
-            </a:r>
-            <a:r>
-              <a:rPr lang="en-US" dirty="0">
-                <a:latin typeface="Times New Roman" panose="02020603050405020304" pitchFamily="18" charset="0"/>
-                <a:ea typeface="Times New Roman" panose="02020603050405020304" pitchFamily="18" charset="0"/>
-              </a:rPr>
-              <a:t> </a:t>
-            </a:r>
-            <a:r>
-              <a:rPr lang="en-US" dirty="0" err="1">
-                <a:latin typeface="Times New Roman" panose="02020603050405020304" pitchFamily="18" charset="0"/>
-                <a:ea typeface="Times New Roman" panose="02020603050405020304" pitchFamily="18" charset="0"/>
-              </a:rPr>
-              <a:t>qarshi</a:t>
-            </a:r>
-            <a:r>
-              <a:rPr lang="en-US" dirty="0">
-                <a:latin typeface="Times New Roman" panose="02020603050405020304" pitchFamily="18" charset="0"/>
-                <a:ea typeface="Times New Roman" panose="02020603050405020304" pitchFamily="18" charset="0"/>
-              </a:rPr>
-              <a:t> “axis of upheaval” deb </a:t>
-            </a:r>
-            <a:r>
-              <a:rPr lang="en-US" dirty="0" err="1">
-                <a:latin typeface="Times New Roman" panose="02020603050405020304" pitchFamily="18" charset="0"/>
-                <a:ea typeface="Times New Roman" panose="02020603050405020304" pitchFamily="18" charset="0"/>
-              </a:rPr>
-              <a:t>atalayotgan</a:t>
-            </a:r>
-            <a:r>
-              <a:rPr lang="en-US" dirty="0">
-                <a:latin typeface="Times New Roman" panose="02020603050405020304" pitchFamily="18" charset="0"/>
-                <a:ea typeface="Times New Roman" panose="02020603050405020304" pitchFamily="18" charset="0"/>
-              </a:rPr>
-              <a:t> </a:t>
-            </a:r>
-            <a:r>
-              <a:rPr lang="en-US" dirty="0" err="1">
-                <a:latin typeface="Times New Roman" panose="02020603050405020304" pitchFamily="18" charset="0"/>
-                <a:ea typeface="Times New Roman" panose="02020603050405020304" pitchFamily="18" charset="0"/>
-              </a:rPr>
-              <a:t>simvolik</a:t>
-            </a:r>
-            <a:r>
-              <a:rPr lang="en-US" dirty="0">
-                <a:latin typeface="Times New Roman" panose="02020603050405020304" pitchFamily="18" charset="0"/>
-                <a:ea typeface="Times New Roman" panose="02020603050405020304" pitchFamily="18" charset="0"/>
-              </a:rPr>
-              <a:t> </a:t>
-            </a:r>
-            <a:r>
-              <a:rPr lang="en-US" dirty="0" err="1">
-                <a:latin typeface="Times New Roman" panose="02020603050405020304" pitchFamily="18" charset="0"/>
-                <a:ea typeface="Times New Roman" panose="02020603050405020304" pitchFamily="18" charset="0"/>
-              </a:rPr>
-              <a:t>birlashmalar</a:t>
-            </a:r>
-            <a:r>
-              <a:rPr lang="en-US" dirty="0">
-                <a:latin typeface="Times New Roman" panose="02020603050405020304" pitchFamily="18" charset="0"/>
-                <a:ea typeface="Times New Roman" panose="02020603050405020304" pitchFamily="18" charset="0"/>
-              </a:rPr>
-              <a:t> </a:t>
-            </a:r>
-            <a:r>
-              <a:rPr lang="en-US" dirty="0" err="1">
-                <a:latin typeface="Times New Roman" panose="02020603050405020304" pitchFamily="18" charset="0"/>
-                <a:ea typeface="Times New Roman" panose="02020603050405020304" pitchFamily="18" charset="0"/>
-              </a:rPr>
-              <a:t>kuchaymoqda</a:t>
-            </a:r>
-            <a:r>
-              <a:rPr lang="en-US" dirty="0">
-                <a:latin typeface="Times New Roman" panose="02020603050405020304" pitchFamily="18" charset="0"/>
-                <a:ea typeface="Times New Roman" panose="02020603050405020304" pitchFamily="18" charset="0"/>
-              </a:rPr>
-              <a:t>. </a:t>
-            </a:r>
+                <a:cs typeface="Times New Roman" panose="02020603050405020304" pitchFamily="18" charset="0"/>
+                <a:hlinkClick r:id="rId4"/>
+              </a:rPr>
+              <a:t>Reuters</a:t>
+            </a:r>
+            <a:endParaRPr lang="en-US" dirty="0">
+              <a:latin typeface="Times New Roman" panose="02020603050405020304" pitchFamily="18" charset="0"/>
+              <a:cs typeface="Times New Roman" panose="02020603050405020304" pitchFamily="18" charset="0"/>
+            </a:endParaRPr>
           </a:p>
         </p:txBody>
       </p:sp>
     </p:spTree>
     <p:extLst>
       <p:ext uri="{BB962C8B-B14F-4D97-AF65-F5344CB8AC3E}">
-        <p14:creationId xmlns:p14="http://schemas.microsoft.com/office/powerpoint/2010/main" val="3973938244"/>
+        <p14:creationId xmlns:p14="http://schemas.microsoft.com/office/powerpoint/2010/main" val="874669710"/>
       </p:ext>
     </p:extLst>
   </p:cSld>
